--- a/app/templates/default.pptx
+++ b/app/templates/default.pptx
@@ -6,8 +6,13 @@
   </p:sldMasterIdLst>
   <p:sldIdLst>
     <p:sldId id="256" r:id="rId7"/>
+    <p:sldId id="257" r:id="rId8"/>
+    <p:sldId id="258" r:id="rId10"/>
+    <p:sldId id="259" r:id="rId11"/>
+    <p:sldId id="260" r:id="rId12"/>
+    <p:sldId id="261" r:id="rId13"/>
   </p:sldIdLst>
-  <p:sldSz cx="9144000" cy="5143500" type="screen4x3"/>
+  <p:sldSz cx="12191695" cy="6858000" type="screen4x3"/>
   <p:notesSz cx="6858000" cy="9144000"/>
   <p:defaultTextStyle>
     <a:defPPr>
@@ -105,6 +110,636 @@
     </a:lvl9pPr>
   </p:defaultTextStyle>
 </p:presentation>
+</file>
+
+<file path=ppt/notesMasters/notesMaster1.xml><?xml version="1.0" encoding="utf-8"?>
+<p:notesMaster xmlns:a="http://schemas.openxmlformats.org/drawingml/2006/main" xmlns:p="http://schemas.openxmlformats.org/presentationml/2006/main" xmlns:r="http://schemas.openxmlformats.org/officeDocument/2006/relationships">
+  <p:cSld>
+    <p:bg>
+      <p:bgRef idx="1001">
+        <a:schemeClr val="bg1"/>
+      </p:bgRef>
+    </p:bg>
+    <p:spTree>
+      <p:nvGrpSpPr>
+        <p:cNvPr id="1" name=""/>
+        <p:cNvGrpSpPr/>
+        <p:nvPr/>
+      </p:nvGrpSpPr>
+      <p:grpSpPr>
+        <a:xfrm>
+          <a:off x="0" y="0"/>
+          <a:ext cx="0" cy="0"/>
+          <a:chOff x="0" y="0"/>
+          <a:chExt cx="0" cy="0"/>
+        </a:xfrm>
+      </p:grpSpPr>
+      <p:sp>
+        <p:nvSpPr>
+          <p:cNvPr id="2" name="Header Placeholder 1"/>
+          <p:cNvSpPr>
+            <a:spLocks noGrp="1"/>
+          </p:cNvSpPr>
+          <p:nvPr>
+            <p:ph type="hdr" sz="quarter"/>
+          </p:nvPr>
+        </p:nvSpPr>
+        <p:spPr>
+          <a:xfrm>
+            <a:off x="0" y="0"/>
+            <a:ext cx="2971800" cy="457200"/>
+          </a:xfrm>
+          <a:prstGeom prst="rect">
+            <a:avLst/>
+          </a:prstGeom>
+        </p:spPr>
+        <p:txBody>
+          <a:bodyPr vert="horz" lIns="91440" tIns="45720" rIns="91440" bIns="45720" rtlCol="0"/>
+          <a:lstStyle>
+            <a:lvl1pPr algn="l">
+              <a:defRPr sz="1200"/>
+            </a:lvl1pPr>
+          </a:lstStyle>
+          <a:p>
+            <a:endParaRPr lang="en-US"/>
+          </a:p>
+        </p:txBody>
+      </p:sp>
+      <p:sp>
+        <p:nvSpPr>
+          <p:cNvPr id="3" name="Date Placeholder 2"/>
+          <p:cNvSpPr>
+            <a:spLocks noGrp="1"/>
+          </p:cNvSpPr>
+          <p:nvPr>
+            <p:ph type="dt" idx="1"/>
+          </p:nvPr>
+        </p:nvSpPr>
+        <p:spPr>
+          <a:xfrm>
+            <a:off x="3884613" y="0"/>
+            <a:ext cx="2971800" cy="457200"/>
+          </a:xfrm>
+          <a:prstGeom prst="rect">
+            <a:avLst/>
+          </a:prstGeom>
+        </p:spPr>
+        <p:txBody>
+          <a:bodyPr vert="horz" lIns="91440" tIns="45720" rIns="91440" bIns="45720" rtlCol="0"/>
+          <a:lstStyle>
+            <a:lvl1pPr algn="r">
+              <a:defRPr sz="1200"/>
+            </a:lvl1pPr>
+          </a:lstStyle>
+          <a:p>
+            <a:fld id="{0F89C1C7-3DCD-1040-A9CF-14679D8B5DDD}" type="datetimeFigureOut">
+              <a:rPr lang="en-US" smtClean="0"/>
+              <a:t>10/17/16</a:t>
+            </a:fld>
+            <a:endParaRPr lang="en-US"/>
+          </a:p>
+        </p:txBody>
+      </p:sp>
+      <p:sp>
+        <p:nvSpPr>
+          <p:cNvPr id="4" name="Slide Image Placeholder 3"/>
+          <p:cNvSpPr>
+            <a:spLocks noGrp="1" noRot="1" noChangeAspect="1"/>
+          </p:cNvSpPr>
+          <p:nvPr>
+            <p:ph type="sldImg" idx="2"/>
+          </p:nvPr>
+        </p:nvSpPr>
+        <p:spPr>
+          <a:xfrm>
+            <a:off x="1143000" y="685800"/>
+            <a:ext cx="4572000" cy="3429000"/>
+          </a:xfrm>
+          <a:prstGeom prst="rect">
+            <a:avLst/>
+          </a:prstGeom>
+          <a:noFill/>
+          <a:ln w="12700">
+            <a:solidFill>
+              <a:prstClr val="black"/>
+            </a:solidFill>
+          </a:ln>
+        </p:spPr>
+        <p:txBody>
+          <a:bodyPr vert="horz" lIns="91440" tIns="45720" rIns="91440" bIns="45720" rtlCol="0" anchor="ctr"/>
+          <a:lstStyle/>
+          <a:p>
+            <a:endParaRPr lang="en-US"/>
+          </a:p>
+        </p:txBody>
+      </p:sp>
+      <p:sp>
+        <p:nvSpPr>
+          <p:cNvPr id="5" name="Notes Placeholder 4"/>
+          <p:cNvSpPr>
+            <a:spLocks noGrp="1"/>
+          </p:cNvSpPr>
+          <p:nvPr>
+            <p:ph type="body" sz="quarter" idx="3"/>
+          </p:nvPr>
+        </p:nvSpPr>
+        <p:spPr>
+          <a:xfrm>
+            <a:off x="685800" y="4343400"/>
+            <a:ext cx="5486400" cy="4114800"/>
+          </a:xfrm>
+          <a:prstGeom prst="rect">
+            <a:avLst/>
+          </a:prstGeom>
+        </p:spPr>
+        <p:txBody>
+          <a:bodyPr vert="horz" lIns="91440" tIns="45720" rIns="91440" bIns="45720" rtlCol="0"/>
+          <a:lstStyle/>
+          <a:p>
+            <a:pPr lvl="0"/>
+            <a:r>
+              <a:rPr lang="en-US" smtClean="0"/>
+              <a:t>Click to edit Master text styles</a:t>
+            </a:r>
+          </a:p>
+          <a:p>
+            <a:pPr lvl="1"/>
+            <a:r>
+              <a:rPr lang="en-US" smtClean="0"/>
+              <a:t>Second level</a:t>
+            </a:r>
+          </a:p>
+          <a:p>
+            <a:pPr lvl="2"/>
+            <a:r>
+              <a:rPr lang="en-US" smtClean="0"/>
+              <a:t>Third level</a:t>
+            </a:r>
+          </a:p>
+          <a:p>
+            <a:pPr lvl="3"/>
+            <a:r>
+              <a:rPr lang="en-US" smtClean="0"/>
+              <a:t>Fourth level</a:t>
+            </a:r>
+          </a:p>
+          <a:p>
+            <a:pPr lvl="4"/>
+            <a:r>
+              <a:rPr lang="en-US" smtClean="0"/>
+              <a:t>Fifth level</a:t>
+            </a:r>
+            <a:endParaRPr lang="en-US"/>
+          </a:p>
+        </p:txBody>
+      </p:sp>
+      <p:sp>
+        <p:nvSpPr>
+          <p:cNvPr id="6" name="Footer Placeholder 5"/>
+          <p:cNvSpPr>
+            <a:spLocks noGrp="1"/>
+          </p:cNvSpPr>
+          <p:nvPr>
+            <p:ph type="ftr" sz="quarter" idx="4"/>
+          </p:nvPr>
+        </p:nvSpPr>
+        <p:spPr>
+          <a:xfrm>
+            <a:off x="0" y="8685213"/>
+            <a:ext cx="2971800" cy="457200"/>
+          </a:xfrm>
+          <a:prstGeom prst="rect">
+            <a:avLst/>
+          </a:prstGeom>
+        </p:spPr>
+        <p:txBody>
+          <a:bodyPr vert="horz" lIns="91440" tIns="45720" rIns="91440" bIns="45720" rtlCol="0" anchor="b"/>
+          <a:lstStyle>
+            <a:lvl1pPr algn="l">
+              <a:defRPr sz="1200"/>
+            </a:lvl1pPr>
+          </a:lstStyle>
+          <a:p>
+            <a:endParaRPr lang="en-US"/>
+          </a:p>
+        </p:txBody>
+      </p:sp>
+      <p:sp>
+        <p:nvSpPr>
+          <p:cNvPr id="7" name="Slide Number Placeholder 6"/>
+          <p:cNvSpPr>
+            <a:spLocks noGrp="1"/>
+          </p:cNvSpPr>
+          <p:nvPr>
+            <p:ph type="sldNum" sz="quarter" idx="5"/>
+          </p:nvPr>
+        </p:nvSpPr>
+        <p:spPr>
+          <a:xfrm>
+            <a:off x="3884613" y="8685213"/>
+            <a:ext cx="2971800" cy="457200"/>
+          </a:xfrm>
+          <a:prstGeom prst="rect">
+            <a:avLst/>
+          </a:prstGeom>
+        </p:spPr>
+        <p:txBody>
+          <a:bodyPr vert="horz" lIns="91440" tIns="45720" rIns="91440" bIns="45720" rtlCol="0" anchor="b"/>
+          <a:lstStyle>
+            <a:lvl1pPr algn="r">
+              <a:defRPr sz="1200"/>
+            </a:lvl1pPr>
+          </a:lstStyle>
+          <a:p>
+            <a:fld id="{BB5E49A5-4136-284D-997B-48E1D791AD67}" type="slidenum">
+              <a:rPr lang="en-US" smtClean="0"/>
+              <a:t>‹#›</a:t>
+            </a:fld>
+            <a:endParaRPr lang="en-US"/>
+          </a:p>
+        </p:txBody>
+      </p:sp>
+    </p:spTree>
+    <p:extLst>
+      <p:ext uri="{BB962C8B-B14F-4D97-AF65-F5344CB8AC3E}">
+        <p14:creationId xmlns:p14="http://schemas.microsoft.com/office/powerpoint/2010/main" val="2623252185"/>
+      </p:ext>
+    </p:extLst>
+  </p:cSld>
+  <p:clrMap bg1="lt1" tx1="dk1" bg2="lt2" tx2="dk2" accent1="accent1" accent2="accent2" accent3="accent3" accent4="accent4" accent5="accent5" accent6="accent6" hlink="hlink" folHlink="folHlink"/>
+  <p:notesStyle>
+    <a:lvl1pPr marL="0" algn="l" defTabSz="457200" rtl="0" eaLnBrk="1" latinLnBrk="0" hangingPunct="1">
+      <a:defRPr sz="1200" kern="1200">
+        <a:solidFill>
+          <a:schemeClr val="tx1"/>
+        </a:solidFill>
+        <a:latin typeface="+mn-lt"/>
+        <a:ea typeface="+mn-ea"/>
+        <a:cs typeface="+mn-cs"/>
+      </a:defRPr>
+    </a:lvl1pPr>
+    <a:lvl2pPr marL="457200" algn="l" defTabSz="457200" rtl="0" eaLnBrk="1" latinLnBrk="0" hangingPunct="1">
+      <a:defRPr sz="1200" kern="1200">
+        <a:solidFill>
+          <a:schemeClr val="tx1"/>
+        </a:solidFill>
+        <a:latin typeface="+mn-lt"/>
+        <a:ea typeface="+mn-ea"/>
+        <a:cs typeface="+mn-cs"/>
+      </a:defRPr>
+    </a:lvl2pPr>
+    <a:lvl3pPr marL="914400" algn="l" defTabSz="457200" rtl="0" eaLnBrk="1" latinLnBrk="0" hangingPunct="1">
+      <a:defRPr sz="1200" kern="1200">
+        <a:solidFill>
+          <a:schemeClr val="tx1"/>
+        </a:solidFill>
+        <a:latin typeface="+mn-lt"/>
+        <a:ea typeface="+mn-ea"/>
+        <a:cs typeface="+mn-cs"/>
+      </a:defRPr>
+    </a:lvl3pPr>
+    <a:lvl4pPr marL="1371600" algn="l" defTabSz="457200" rtl="0" eaLnBrk="1" latinLnBrk="0" hangingPunct="1">
+      <a:defRPr sz="1200" kern="1200">
+        <a:solidFill>
+          <a:schemeClr val="tx1"/>
+        </a:solidFill>
+        <a:latin typeface="+mn-lt"/>
+        <a:ea typeface="+mn-ea"/>
+        <a:cs typeface="+mn-cs"/>
+      </a:defRPr>
+    </a:lvl4pPr>
+    <a:lvl5pPr marL="1828800" algn="l" defTabSz="457200" rtl="0" eaLnBrk="1" latinLnBrk="0" hangingPunct="1">
+      <a:defRPr sz="1200" kern="1200">
+        <a:solidFill>
+          <a:schemeClr val="tx1"/>
+        </a:solidFill>
+        <a:latin typeface="+mn-lt"/>
+        <a:ea typeface="+mn-ea"/>
+        <a:cs typeface="+mn-cs"/>
+      </a:defRPr>
+    </a:lvl5pPr>
+    <a:lvl6pPr marL="2286000" algn="l" defTabSz="457200" rtl="0" eaLnBrk="1" latinLnBrk="0" hangingPunct="1">
+      <a:defRPr sz="1200" kern="1200">
+        <a:solidFill>
+          <a:schemeClr val="tx1"/>
+        </a:solidFill>
+        <a:latin typeface="+mn-lt"/>
+        <a:ea typeface="+mn-ea"/>
+        <a:cs typeface="+mn-cs"/>
+      </a:defRPr>
+    </a:lvl6pPr>
+    <a:lvl7pPr marL="2743200" algn="l" defTabSz="457200" rtl="0" eaLnBrk="1" latinLnBrk="0" hangingPunct="1">
+      <a:defRPr sz="1200" kern="1200">
+        <a:solidFill>
+          <a:schemeClr val="tx1"/>
+        </a:solidFill>
+        <a:latin typeface="+mn-lt"/>
+        <a:ea typeface="+mn-ea"/>
+        <a:cs typeface="+mn-cs"/>
+      </a:defRPr>
+    </a:lvl7pPr>
+    <a:lvl8pPr marL="3200400" algn="l" defTabSz="457200" rtl="0" eaLnBrk="1" latinLnBrk="0" hangingPunct="1">
+      <a:defRPr sz="1200" kern="1200">
+        <a:solidFill>
+          <a:schemeClr val="tx1"/>
+        </a:solidFill>
+        <a:latin typeface="+mn-lt"/>
+        <a:ea typeface="+mn-ea"/>
+        <a:cs typeface="+mn-cs"/>
+      </a:defRPr>
+    </a:lvl8pPr>
+    <a:lvl9pPr marL="3657600" algn="l" defTabSz="457200" rtl="0" eaLnBrk="1" latinLnBrk="0" hangingPunct="1">
+      <a:defRPr sz="1200" kern="1200">
+        <a:solidFill>
+          <a:schemeClr val="tx1"/>
+        </a:solidFill>
+        <a:latin typeface="+mn-lt"/>
+        <a:ea typeface="+mn-ea"/>
+        <a:cs typeface="+mn-cs"/>
+      </a:defRPr>
+    </a:lvl9pPr>
+  </p:notesStyle>
+</p:notesMaster>
+</file>
+
+<file path=ppt/notesSlides/notesSlide1.xml><?xml version="1.0" encoding="utf-8"?>
+<p:notes xmlns:a="http://schemas.openxmlformats.org/drawingml/2006/main" xmlns:p="http://schemas.openxmlformats.org/presentationml/2006/main" xmlns:r="http://schemas.openxmlformats.org/officeDocument/2006/relationships">
+  <p:cSld>
+    <p:spTree>
+      <p:nvGrpSpPr>
+        <p:cNvPr id="1" name=""/>
+        <p:cNvGrpSpPr/>
+        <p:nvPr/>
+      </p:nvGrpSpPr>
+      <p:grpSpPr>
+        <a:xfrm>
+          <a:off x="0" y="0"/>
+          <a:ext cx="0" cy="0"/>
+          <a:chOff x="0" y="0"/>
+          <a:chExt cx="0" cy="0"/>
+        </a:xfrm>
+      </p:grpSpPr>
+      <p:sp>
+        <p:nvSpPr>
+          <p:cNvPr id="2" name="Slide Image Placeholder 1"/>
+          <p:cNvSpPr>
+            <a:spLocks noGrp="1"/>
+          </p:cNvSpPr>
+          <p:nvPr>
+            <p:ph type="sldImg" idx="2"/>
+          </p:nvPr>
+        </p:nvSpPr>
+        <p:spPr/>
+      </p:sp>
+      <p:sp>
+        <p:nvSpPr>
+          <p:cNvPr id="3" name="Notes Placeholder 2"/>
+          <p:cNvSpPr>
+            <a:spLocks noGrp="1"/>
+          </p:cNvSpPr>
+          <p:nvPr>
+            <p:ph type="body" idx="3" sz="quarter"/>
+          </p:nvPr>
+        </p:nvSpPr>
+        <p:spPr/>
+        <p:txBody>
+          <a:bodyPr/>
+          <a:lstStyle/>
+          <a:p>
+            <a:r>
+              <a:t>Use this slide to set purpose and activate prior knowledge.</a:t>
+            </a:r>
+          </a:p>
+        </p:txBody>
+      </p:sp>
+      <p:sp>
+        <p:nvSpPr>
+          <p:cNvPr id="4" name="Slide Number Placeholder 3"/>
+          <p:cNvSpPr>
+            <a:spLocks noGrp="1"/>
+          </p:cNvSpPr>
+          <p:nvPr>
+            <p:ph type="sldNum" idx="5" sz="quarter"/>
+          </p:nvPr>
+        </p:nvSpPr>
+        <p:spPr/>
+      </p:sp>
+    </p:spTree>
+  </p:cSld>
+  <p:clrMapOvr>
+    <a:masterClrMapping/>
+  </p:clrMapOvr>
+</p:notes>
+</file>
+
+<file path=ppt/notesSlides/notesSlide2.xml><?xml version="1.0" encoding="utf-8"?>
+<p:notes xmlns:a="http://schemas.openxmlformats.org/drawingml/2006/main" xmlns:p="http://schemas.openxmlformats.org/presentationml/2006/main" xmlns:r="http://schemas.openxmlformats.org/officeDocument/2006/relationships">
+  <p:cSld>
+    <p:spTree>
+      <p:nvGrpSpPr>
+        <p:cNvPr id="1" name=""/>
+        <p:cNvGrpSpPr/>
+        <p:nvPr/>
+      </p:nvGrpSpPr>
+      <p:grpSpPr>
+        <a:xfrm>
+          <a:off x="0" y="0"/>
+          <a:ext cx="0" cy="0"/>
+          <a:chOff x="0" y="0"/>
+          <a:chExt cx="0" cy="0"/>
+        </a:xfrm>
+      </p:grpSpPr>
+      <p:sp>
+        <p:nvSpPr>
+          <p:cNvPr id="2" name="Slide Image Placeholder 1"/>
+          <p:cNvSpPr>
+            <a:spLocks noGrp="1"/>
+          </p:cNvSpPr>
+          <p:nvPr>
+            <p:ph type="sldImg" idx="2"/>
+          </p:nvPr>
+        </p:nvSpPr>
+        <p:spPr/>
+      </p:sp>
+      <p:sp>
+        <p:nvSpPr>
+          <p:cNvPr id="3" name="Notes Placeholder 2"/>
+          <p:cNvSpPr>
+            <a:spLocks noGrp="1"/>
+          </p:cNvSpPr>
+          <p:nvPr>
+            <p:ph type="body" idx="3" sz="quarter"/>
+          </p:nvPr>
+        </p:nvSpPr>
+        <p:spPr/>
+        <p:txBody>
+          <a:bodyPr/>
+          <a:lstStyle/>
+          <a:p>
+            <a:r>
+              <a:t>Keep the slide concise and put the extra explanation here.</a:t>
+            </a:r>
+          </a:p>
+        </p:txBody>
+      </p:sp>
+      <p:sp>
+        <p:nvSpPr>
+          <p:cNvPr id="4" name="Slide Number Placeholder 3"/>
+          <p:cNvSpPr>
+            <a:spLocks noGrp="1"/>
+          </p:cNvSpPr>
+          <p:nvPr>
+            <p:ph type="sldNum" idx="5" sz="quarter"/>
+          </p:nvPr>
+        </p:nvSpPr>
+        <p:spPr/>
+      </p:sp>
+    </p:spTree>
+  </p:cSld>
+  <p:clrMapOvr>
+    <a:masterClrMapping/>
+  </p:clrMapOvr>
+</p:notes>
+</file>
+
+<file path=ppt/notesSlides/notesSlide3.xml><?xml version="1.0" encoding="utf-8"?>
+<p:notes xmlns:a="http://schemas.openxmlformats.org/drawingml/2006/main" xmlns:p="http://schemas.openxmlformats.org/presentationml/2006/main" xmlns:r="http://schemas.openxmlformats.org/officeDocument/2006/relationships">
+  <p:cSld>
+    <p:spTree>
+      <p:nvGrpSpPr>
+        <p:cNvPr id="1" name=""/>
+        <p:cNvGrpSpPr/>
+        <p:nvPr/>
+      </p:nvGrpSpPr>
+      <p:grpSpPr>
+        <a:xfrm>
+          <a:off x="0" y="0"/>
+          <a:ext cx="0" cy="0"/>
+          <a:chOff x="0" y="0"/>
+          <a:chExt cx="0" cy="0"/>
+        </a:xfrm>
+      </p:grpSpPr>
+      <p:sp>
+        <p:nvSpPr>
+          <p:cNvPr id="2" name="Slide Image Placeholder 1"/>
+          <p:cNvSpPr>
+            <a:spLocks noGrp="1"/>
+          </p:cNvSpPr>
+          <p:nvPr>
+            <p:ph type="sldImg" idx="2"/>
+          </p:nvPr>
+        </p:nvSpPr>
+        <p:spPr/>
+      </p:sp>
+      <p:sp>
+        <p:nvSpPr>
+          <p:cNvPr id="3" name="Notes Placeholder 2"/>
+          <p:cNvSpPr>
+            <a:spLocks noGrp="1"/>
+          </p:cNvSpPr>
+          <p:nvPr>
+            <p:ph type="body" idx="3" sz="quarter"/>
+          </p:nvPr>
+        </p:nvSpPr>
+        <p:spPr/>
+        <p:txBody>
+          <a:bodyPr/>
+          <a:lstStyle/>
+          <a:p>
+            <a:r>
+              <a:t>Let students answer first, then reveal the teacher key.</a:t>
+            </a:r>
+          </a:p>
+        </p:txBody>
+      </p:sp>
+      <p:sp>
+        <p:nvSpPr>
+          <p:cNvPr id="4" name="Slide Number Placeholder 3"/>
+          <p:cNvSpPr>
+            <a:spLocks noGrp="1"/>
+          </p:cNvSpPr>
+          <p:nvPr>
+            <p:ph type="sldNum" idx="5" sz="quarter"/>
+          </p:nvPr>
+        </p:nvSpPr>
+        <p:spPr/>
+      </p:sp>
+    </p:spTree>
+  </p:cSld>
+  <p:clrMapOvr>
+    <a:masterClrMapping/>
+  </p:clrMapOvr>
+</p:notes>
+</file>
+
+<file path=ppt/notesSlides/notesSlide4.xml><?xml version="1.0" encoding="utf-8"?>
+<p:notes xmlns:a="http://schemas.openxmlformats.org/drawingml/2006/main" xmlns:p="http://schemas.openxmlformats.org/presentationml/2006/main" xmlns:r="http://schemas.openxmlformats.org/officeDocument/2006/relationships">
+  <p:cSld>
+    <p:spTree>
+      <p:nvGrpSpPr>
+        <p:cNvPr id="1" name=""/>
+        <p:cNvGrpSpPr/>
+        <p:nvPr/>
+      </p:nvGrpSpPr>
+      <p:grpSpPr>
+        <a:xfrm>
+          <a:off x="0" y="0"/>
+          <a:ext cx="0" cy="0"/>
+          <a:chOff x="0" y="0"/>
+          <a:chExt cx="0" cy="0"/>
+        </a:xfrm>
+      </p:grpSpPr>
+      <p:sp>
+        <p:nvSpPr>
+          <p:cNvPr id="2" name="Slide Image Placeholder 1"/>
+          <p:cNvSpPr>
+            <a:spLocks noGrp="1"/>
+          </p:cNvSpPr>
+          <p:nvPr>
+            <p:ph type="sldImg" idx="2"/>
+          </p:nvPr>
+        </p:nvSpPr>
+        <p:spPr/>
+      </p:sp>
+      <p:sp>
+        <p:nvSpPr>
+          <p:cNvPr id="3" name="Notes Placeholder 2"/>
+          <p:cNvSpPr>
+            <a:spLocks noGrp="1"/>
+          </p:cNvSpPr>
+          <p:nvPr>
+            <p:ph type="body" idx="3" sz="quarter"/>
+          </p:nvPr>
+        </p:nvSpPr>
+        <p:spPr/>
+        <p:txBody>
+          <a:bodyPr/>
+          <a:lstStyle/>
+          <a:p>
+            <a:r>
+              <a:t>Use this as an exit-ticket prompt.</a:t>
+            </a:r>
+          </a:p>
+        </p:txBody>
+      </p:sp>
+      <p:sp>
+        <p:nvSpPr>
+          <p:cNvPr id="4" name="Slide Number Placeholder 3"/>
+          <p:cNvSpPr>
+            <a:spLocks noGrp="1"/>
+          </p:cNvSpPr>
+          <p:nvPr>
+            <p:ph type="sldNum" idx="5" sz="quarter"/>
+          </p:nvPr>
+        </p:nvSpPr>
+        <p:spPr/>
+      </p:sp>
+    </p:spTree>
+  </p:cSld>
+  <p:clrMapOvr>
+    <a:masterClrMapping/>
+  </p:clrMapOvr>
+</p:notes>
 </file>
 
 <file path=ppt/slideLayouts/slideLayout1.xml><?xml version="1.0" encoding="utf-8"?>
@@ -3081,6 +3716,14 @@
 <file path=ppt/slides/slide1.xml><?xml version="1.0" encoding="utf-8"?>
 <p:sld xmlns:a="http://schemas.openxmlformats.org/drawingml/2006/main" xmlns:p="http://schemas.openxmlformats.org/presentationml/2006/main" xmlns:r="http://schemas.openxmlformats.org/officeDocument/2006/relationships">
   <p:cSld>
+    <p:bg>
+      <p:bgPr>
+        <a:solidFill>
+          <a:srgbClr val="F8FAFC"/>
+        </a:solidFill>
+        <a:effectLst/>
+      </p:bgPr>
+    </p:bg>
     <p:spTree>
       <p:nvGrpSpPr>
         <p:cNvPr id="1" name=""/>
@@ -3090,14 +3733,186 @@
       <p:grpSpPr/>
       <p:sp>
         <p:nvSpPr>
-          <p:cNvPr id="2" name="TextBox 1"/>
+          <p:cNvPr id="2" name="Rectangle 1"/>
+          <p:cNvSpPr/>
+          <p:nvPr/>
+        </p:nvSpPr>
+        <p:spPr>
+          <a:xfrm>
+            <a:off x="0" y="0"/>
+            <a:ext cx="12191695" cy="6858000"/>
+          </a:xfrm>
+          <a:prstGeom prst="rect">
+            <a:avLst/>
+          </a:prstGeom>
+          <a:solidFill>
+            <a:srgbClr val="F8FAFC"/>
+          </a:solidFill>
+          <a:ln>
+            <a:noFill/>
+          </a:ln>
+        </p:spPr>
+        <p:style>
+          <a:lnRef idx="1">
+            <a:schemeClr val="accent1"/>
+          </a:lnRef>
+          <a:fillRef idx="3">
+            <a:schemeClr val="accent1"/>
+          </a:fillRef>
+          <a:effectRef idx="2">
+            <a:schemeClr val="accent1"/>
+          </a:effectRef>
+          <a:fontRef idx="minor">
+            <a:schemeClr val="lt1"/>
+          </a:fontRef>
+        </p:style>
+        <p:txBody>
+          <a:bodyPr rtlCol="0" anchor="ctr"/>
+          <a:lstStyle/>
+          <a:p>
+            <a:pPr algn="ctr"/>
+          </a:p>
+        </p:txBody>
+      </p:sp>
+      <p:sp>
+        <p:nvSpPr>
+          <p:cNvPr id="3" name="Rectangle 2"/>
+          <p:cNvSpPr/>
+          <p:nvPr/>
+        </p:nvSpPr>
+        <p:spPr>
+          <a:xfrm>
+            <a:off x="6766560" y="0"/>
+            <a:ext cx="5422392" cy="6858000"/>
+          </a:xfrm>
+          <a:prstGeom prst="rect">
+            <a:avLst/>
+          </a:prstGeom>
+          <a:solidFill>
+            <a:srgbClr val="14B8A6"/>
+          </a:solidFill>
+          <a:ln>
+            <a:noFill/>
+          </a:ln>
+        </p:spPr>
+        <p:style>
+          <a:lnRef idx="1">
+            <a:schemeClr val="accent1"/>
+          </a:lnRef>
+          <a:fillRef idx="3">
+            <a:schemeClr val="accent1"/>
+          </a:fillRef>
+          <a:effectRef idx="2">
+            <a:schemeClr val="accent1"/>
+          </a:effectRef>
+          <a:fontRef idx="minor">
+            <a:schemeClr val="lt1"/>
+          </a:fontRef>
+        </p:style>
+        <p:txBody>
+          <a:bodyPr rtlCol="0" anchor="ctr"/>
+          <a:lstStyle/>
+          <a:p>
+            <a:pPr algn="ctr"/>
+          </a:p>
+        </p:txBody>
+      </p:sp>
+      <p:sp>
+        <p:nvSpPr>
+          <p:cNvPr id="4" name="Rounded Rectangle 3"/>
+          <p:cNvSpPr/>
+          <p:nvPr/>
+        </p:nvSpPr>
+        <p:spPr>
+          <a:xfrm>
+            <a:off x="7406640" y="658368"/>
+            <a:ext cx="4160520" cy="5532120"/>
+          </a:xfrm>
+          <a:prstGeom prst="roundRect">
+            <a:avLst/>
+          </a:prstGeom>
+          <a:solidFill>
+            <a:srgbClr val="FFFFFF"/>
+          </a:solidFill>
+          <a:ln>
+            <a:noFill/>
+          </a:ln>
+        </p:spPr>
+        <p:style>
+          <a:lnRef idx="1">
+            <a:schemeClr val="accent1"/>
+          </a:lnRef>
+          <a:fillRef idx="3">
+            <a:schemeClr val="accent1"/>
+          </a:fillRef>
+          <a:effectRef idx="2">
+            <a:schemeClr val="accent1"/>
+          </a:effectRef>
+          <a:fontRef idx="minor">
+            <a:schemeClr val="lt1"/>
+          </a:fontRef>
+        </p:style>
+        <p:txBody>
+          <a:bodyPr rtlCol="0" anchor="ctr"/>
+          <a:lstStyle/>
+          <a:p>
+            <a:pPr algn="ctr"/>
+          </a:p>
+        </p:txBody>
+      </p:sp>
+      <p:sp>
+        <p:nvSpPr>
+          <p:cNvPr id="5" name="Rounded Rectangle 4"/>
+          <p:cNvSpPr/>
+          <p:nvPr/>
+        </p:nvSpPr>
+        <p:spPr>
+          <a:xfrm>
+            <a:off x="749808" y="658368"/>
+            <a:ext cx="1005840" cy="310896"/>
+          </a:xfrm>
+          <a:prstGeom prst="roundRect">
+            <a:avLst/>
+          </a:prstGeom>
+          <a:solidFill>
+            <a:srgbClr val="14B8A6"/>
+          </a:solidFill>
+          <a:ln>
+            <a:noFill/>
+          </a:ln>
+        </p:spPr>
+        <p:style>
+          <a:lnRef idx="1">
+            <a:schemeClr val="accent1"/>
+          </a:lnRef>
+          <a:fillRef idx="3">
+            <a:schemeClr val="accent1"/>
+          </a:fillRef>
+          <a:effectRef idx="2">
+            <a:schemeClr val="accent1"/>
+          </a:effectRef>
+          <a:fontRef idx="minor">
+            <a:schemeClr val="lt1"/>
+          </a:fontRef>
+        </p:style>
+        <p:txBody>
+          <a:bodyPr rtlCol="0" anchor="ctr"/>
+          <a:lstStyle/>
+          <a:p>
+            <a:pPr algn="ctr"/>
+          </a:p>
+        </p:txBody>
+      </p:sp>
+      <p:sp>
+        <p:nvSpPr>
+          <p:cNvPr id="6" name="TextBox 5"/>
           <p:cNvSpPr txBox="1"/>
           <p:nvPr/>
         </p:nvSpPr>
         <p:spPr>
           <a:xfrm>
-            <a:off x="914400" y="1828800"/>
-            <a:ext cx="7315200" cy="914400"/>
+            <a:off x="841248" y="708660"/>
+            <a:ext cx="822960" cy="164592"/>
           </a:xfrm>
           <a:prstGeom prst="rect">
             <a:avLst/>
@@ -3105,16 +3920,4110 @@
           <a:noFill/>
         </p:spPr>
         <p:txBody>
-          <a:bodyPr wrap="none">
+          <a:bodyPr wrap="square" lIns="18288" rIns="18288" tIns="18288" bIns="18288" anchor="t">
             <a:spAutoFit/>
           </a:bodyPr>
           <a:lstStyle/>
           <a:p>
             <a:pPr algn="ctr">
-              <a:defRPr sz="3200" b="1"/>
+              <a:defRPr sz="800" b="1">
+                <a:solidFill>
+                  <a:srgbClr val="FFFFFF"/>
+                </a:solidFill>
+                <a:latin typeface="Aptos"/>
+              </a:defRPr>
             </a:pPr>
             <a:r>
-              <a:t>Chalkie PowerPoint Template - Default Theme</a:t>
+              <a:t>EDITORIAL</a:t>
+            </a:r>
+          </a:p>
+        </p:txBody>
+      </p:sp>
+      <p:sp>
+        <p:nvSpPr>
+          <p:cNvPr id="7" name="TextBox 6"/>
+          <p:cNvSpPr txBox="1"/>
+          <p:nvPr/>
+        </p:nvSpPr>
+        <p:spPr>
+          <a:xfrm>
+            <a:off x="749808" y="1325880"/>
+            <a:ext cx="5669280" cy="1417320"/>
+          </a:xfrm>
+          <a:prstGeom prst="rect">
+            <a:avLst/>
+          </a:prstGeom>
+          <a:noFill/>
+        </p:spPr>
+        <p:txBody>
+          <a:bodyPr wrap="square" lIns="18288" rIns="18288" tIns="18288" bIns="18288" anchor="t">
+            <a:spAutoFit/>
+          </a:bodyPr>
+          <a:lstStyle/>
+          <a:p>
+            <a:pPr algn="l">
+              <a:defRPr sz="4200" b="1">
+                <a:solidFill>
+                  <a:srgbClr val="111827"/>
+                </a:solidFill>
+                <a:latin typeface="Aptos"/>
+              </a:defRPr>
+            </a:pPr>
+            <a:r>
+              <a:t>Editorial Template</a:t>
+            </a:r>
+          </a:p>
+        </p:txBody>
+      </p:sp>
+      <p:sp>
+        <p:nvSpPr>
+          <p:cNvPr id="8" name="TextBox 7"/>
+          <p:cNvSpPr txBox="1"/>
+          <p:nvPr/>
+        </p:nvSpPr>
+        <p:spPr>
+          <a:xfrm>
+            <a:off x="786384" y="2816352"/>
+            <a:ext cx="5120640" cy="329184"/>
+          </a:xfrm>
+          <a:prstGeom prst="rect">
+            <a:avLst/>
+          </a:prstGeom>
+          <a:noFill/>
+        </p:spPr>
+        <p:txBody>
+          <a:bodyPr wrap="square" lIns="18288" rIns="18288" tIns="18288" bIns="18288" anchor="t">
+            <a:spAutoFit/>
+          </a:bodyPr>
+          <a:lstStyle/>
+          <a:p>
+            <a:pPr algn="l">
+              <a:defRPr sz="1500" b="0">
+                <a:solidFill>
+                  <a:srgbClr val="525E71"/>
+                </a:solidFill>
+                <a:latin typeface="Aptos"/>
+              </a:defRPr>
+            </a:pPr>
+            <a:r>
+              <a:t>Grade 10 | Template Preview</a:t>
+            </a:r>
+          </a:p>
+        </p:txBody>
+      </p:sp>
+      <p:sp>
+        <p:nvSpPr>
+          <p:cNvPr id="9" name="TextBox 8"/>
+          <p:cNvSpPr txBox="1"/>
+          <p:nvPr/>
+        </p:nvSpPr>
+        <p:spPr>
+          <a:xfrm>
+            <a:off x="786384" y="3429000"/>
+            <a:ext cx="5394960" cy="658368"/>
+          </a:xfrm>
+          <a:prstGeom prst="rect">
+            <a:avLst/>
+          </a:prstGeom>
+          <a:noFill/>
+        </p:spPr>
+        <p:txBody>
+          <a:bodyPr wrap="square" lIns="18288" rIns="18288" tIns="18288" bIns="18288" anchor="t">
+            <a:spAutoFit/>
+          </a:bodyPr>
+          <a:lstStyle/>
+          <a:p>
+            <a:pPr algn="l">
+              <a:defRPr sz="1800" b="0">
+                <a:solidFill>
+                  <a:srgbClr val="525E71"/>
+                </a:solidFill>
+                <a:latin typeface="Aptos"/>
+              </a:defRPr>
+            </a:pPr>
+            <a:r>
+              <a:t>A classroom-ready deck with guided explanation, practice, and checks for understanding.</a:t>
+            </a:r>
+          </a:p>
+        </p:txBody>
+      </p:sp>
+      <p:sp>
+        <p:nvSpPr>
+          <p:cNvPr id="10" name="TextBox 9"/>
+          <p:cNvSpPr txBox="1"/>
+          <p:nvPr/>
+        </p:nvSpPr>
+        <p:spPr>
+          <a:xfrm>
+            <a:off x="7790688" y="1234440"/>
+            <a:ext cx="3429000" cy="292608"/>
+          </a:xfrm>
+          <a:prstGeom prst="rect">
+            <a:avLst/>
+          </a:prstGeom>
+          <a:noFill/>
+        </p:spPr>
+        <p:txBody>
+          <a:bodyPr wrap="square" lIns="18288" rIns="18288" tIns="18288" bIns="18288" anchor="t">
+            <a:spAutoFit/>
+          </a:bodyPr>
+          <a:lstStyle/>
+          <a:p>
+            <a:pPr algn="l">
+              <a:defRPr sz="1400" b="1">
+                <a:solidFill>
+                  <a:srgbClr val="111827"/>
+                </a:solidFill>
+                <a:latin typeface="Aptos"/>
+              </a:defRPr>
+            </a:pPr>
+            <a:r>
+              <a:t>Learning Targets</a:t>
+            </a:r>
+          </a:p>
+        </p:txBody>
+      </p:sp>
+      <p:sp>
+        <p:nvSpPr>
+          <p:cNvPr id="11" name="Oval 10"/>
+          <p:cNvSpPr/>
+          <p:nvPr/>
+        </p:nvSpPr>
+        <p:spPr>
+          <a:xfrm>
+            <a:off x="7790688" y="1792224"/>
+            <a:ext cx="118872" cy="118872"/>
+          </a:xfrm>
+          <a:prstGeom prst="ellipse">
+            <a:avLst/>
+          </a:prstGeom>
+          <a:solidFill>
+            <a:srgbClr val="14B8A6"/>
+          </a:solidFill>
+          <a:ln>
+            <a:noFill/>
+          </a:ln>
+        </p:spPr>
+        <p:style>
+          <a:lnRef idx="1">
+            <a:schemeClr val="accent1"/>
+          </a:lnRef>
+          <a:fillRef idx="3">
+            <a:schemeClr val="accent1"/>
+          </a:fillRef>
+          <a:effectRef idx="2">
+            <a:schemeClr val="accent1"/>
+          </a:effectRef>
+          <a:fontRef idx="minor">
+            <a:schemeClr val="lt1"/>
+          </a:fontRef>
+        </p:style>
+        <p:txBody>
+          <a:bodyPr rtlCol="0" anchor="ctr"/>
+          <a:lstStyle/>
+          <a:p>
+            <a:pPr algn="ctr"/>
+          </a:p>
+        </p:txBody>
+      </p:sp>
+      <p:sp>
+        <p:nvSpPr>
+          <p:cNvPr id="12" name="TextBox 11"/>
+          <p:cNvSpPr txBox="1"/>
+          <p:nvPr/>
+        </p:nvSpPr>
+        <p:spPr>
+          <a:xfrm>
+            <a:off x="8046720" y="1737360"/>
+            <a:ext cx="3154680" cy="384048"/>
+          </a:xfrm>
+          <a:prstGeom prst="rect">
+            <a:avLst/>
+          </a:prstGeom>
+          <a:noFill/>
+        </p:spPr>
+        <p:txBody>
+          <a:bodyPr wrap="square" lIns="18288" rIns="18288" tIns="18288" bIns="18288" anchor="t">
+            <a:spAutoFit/>
+          </a:bodyPr>
+          <a:lstStyle/>
+          <a:p>
+            <a:pPr algn="l">
+              <a:defRPr sz="1150" b="0">
+                <a:solidFill>
+                  <a:srgbClr val="525E71"/>
+                </a:solidFill>
+                <a:latin typeface="Aptos"/>
+              </a:defRPr>
+            </a:pPr>
+            <a:r>
+              <a:t>Preview the title, concept, practice, and summary layouts.</a:t>
+            </a:r>
+          </a:p>
+        </p:txBody>
+      </p:sp>
+      <p:sp>
+        <p:nvSpPr>
+          <p:cNvPr id="13" name="TextBox 12"/>
+          <p:cNvSpPr txBox="1"/>
+          <p:nvPr/>
+        </p:nvSpPr>
+        <p:spPr>
+          <a:xfrm>
+            <a:off x="7818120" y="5074920"/>
+            <a:ext cx="3017520" cy="292608"/>
+          </a:xfrm>
+          <a:prstGeom prst="rect">
+            <a:avLst/>
+          </a:prstGeom>
+          <a:noFill/>
+        </p:spPr>
+        <p:txBody>
+          <a:bodyPr wrap="square" lIns="18288" rIns="18288" tIns="18288" bIns="18288" anchor="t">
+            <a:spAutoFit/>
+          </a:bodyPr>
+          <a:lstStyle/>
+          <a:p>
+            <a:pPr algn="l">
+              <a:defRPr sz="1600" b="1">
+                <a:solidFill>
+                  <a:srgbClr val="111827"/>
+                </a:solidFill>
+                <a:latin typeface="Aptos"/>
+              </a:defRPr>
+            </a:pPr>
+            <a:r>
+              <a:t>4 lesson slides</a:t>
+            </a:r>
+          </a:p>
+        </p:txBody>
+      </p:sp>
+      <p:sp>
+        <p:nvSpPr>
+          <p:cNvPr id="14" name="TextBox 13"/>
+          <p:cNvSpPr txBox="1"/>
+          <p:nvPr/>
+        </p:nvSpPr>
+        <p:spPr>
+          <a:xfrm>
+            <a:off x="7818120" y="5468112"/>
+            <a:ext cx="3063240" cy="329184"/>
+          </a:xfrm>
+          <a:prstGeom prst="rect">
+            <a:avLst/>
+          </a:prstGeom>
+          <a:noFill/>
+        </p:spPr>
+        <p:txBody>
+          <a:bodyPr wrap="square" lIns="18288" rIns="18288" tIns="18288" bIns="18288" anchor="t">
+            <a:spAutoFit/>
+          </a:bodyPr>
+          <a:lstStyle/>
+          <a:p>
+            <a:pPr algn="l">
+              <a:defRPr sz="1200" b="0">
+                <a:solidFill>
+                  <a:srgbClr val="525E71"/>
+                </a:solidFill>
+                <a:latin typeface="Aptos"/>
+              </a:defRPr>
+            </a:pPr>
+            <a:r>
+              <a:t>Built for teaching, discussion, and revision.</a:t>
+            </a:r>
+          </a:p>
+        </p:txBody>
+      </p:sp>
+    </p:spTree>
+  </p:cSld>
+  <p:clrMapOvr>
+    <a:masterClrMapping/>
+  </p:clrMapOvr>
+</p:sld>
+</file>
+
+<file path=ppt/slides/slide2.xml><?xml version="1.0" encoding="utf-8"?>
+<p:sld xmlns:a="http://schemas.openxmlformats.org/drawingml/2006/main" xmlns:p="http://schemas.openxmlformats.org/presentationml/2006/main" xmlns:r="http://schemas.openxmlformats.org/officeDocument/2006/relationships">
+  <p:cSld>
+    <p:bg>
+      <p:bgPr>
+        <a:solidFill>
+          <a:srgbClr val="F8FAFC"/>
+        </a:solidFill>
+        <a:effectLst/>
+      </p:bgPr>
+    </p:bg>
+    <p:spTree>
+      <p:nvGrpSpPr>
+        <p:cNvPr id="1" name=""/>
+        <p:cNvGrpSpPr/>
+        <p:nvPr/>
+      </p:nvGrpSpPr>
+      <p:grpSpPr/>
+      <p:sp>
+        <p:nvSpPr>
+          <p:cNvPr id="2" name="Rounded Rectangle 1"/>
+          <p:cNvSpPr/>
+          <p:nvPr/>
+        </p:nvSpPr>
+        <p:spPr>
+          <a:xfrm>
+            <a:off x="566928" y="347472"/>
+            <a:ext cx="1005840" cy="310896"/>
+          </a:xfrm>
+          <a:prstGeom prst="roundRect">
+            <a:avLst/>
+          </a:prstGeom>
+          <a:solidFill>
+            <a:srgbClr val="14B8A6"/>
+          </a:solidFill>
+          <a:ln>
+            <a:noFill/>
+          </a:ln>
+        </p:spPr>
+        <p:style>
+          <a:lnRef idx="1">
+            <a:schemeClr val="accent1"/>
+          </a:lnRef>
+          <a:fillRef idx="3">
+            <a:schemeClr val="accent1"/>
+          </a:fillRef>
+          <a:effectRef idx="2">
+            <a:schemeClr val="accent1"/>
+          </a:effectRef>
+          <a:fontRef idx="minor">
+            <a:schemeClr val="lt1"/>
+          </a:fontRef>
+        </p:style>
+        <p:txBody>
+          <a:bodyPr rtlCol="0" anchor="ctr"/>
+          <a:lstStyle/>
+          <a:p>
+            <a:pPr algn="ctr"/>
+          </a:p>
+        </p:txBody>
+      </p:sp>
+      <p:sp>
+        <p:nvSpPr>
+          <p:cNvPr id="3" name="TextBox 2"/>
+          <p:cNvSpPr txBox="1"/>
+          <p:nvPr/>
+        </p:nvSpPr>
+        <p:spPr>
+          <a:xfrm>
+            <a:off x="658368" y="397764"/>
+            <a:ext cx="822960" cy="164592"/>
+          </a:xfrm>
+          <a:prstGeom prst="rect">
+            <a:avLst/>
+          </a:prstGeom>
+          <a:noFill/>
+        </p:spPr>
+        <p:txBody>
+          <a:bodyPr wrap="square" lIns="18288" rIns="18288" tIns="18288" bIns="18288" anchor="t">
+            <a:spAutoFit/>
+          </a:bodyPr>
+          <a:lstStyle/>
+          <a:p>
+            <a:pPr algn="ctr">
+              <a:defRPr sz="800" b="1">
+                <a:solidFill>
+                  <a:srgbClr val="FFFFFF"/>
+                </a:solidFill>
+                <a:latin typeface="Aptos"/>
+              </a:defRPr>
+            </a:pPr>
+            <a:r>
+              <a:t>INTRODUCTION</a:t>
+            </a:r>
+          </a:p>
+        </p:txBody>
+      </p:sp>
+      <p:sp>
+        <p:nvSpPr>
+          <p:cNvPr id="4" name="TextBox 3"/>
+          <p:cNvSpPr txBox="1"/>
+          <p:nvPr/>
+        </p:nvSpPr>
+        <p:spPr>
+          <a:xfrm>
+            <a:off x="10881360" y="347472"/>
+            <a:ext cx="502920" cy="228600"/>
+          </a:xfrm>
+          <a:prstGeom prst="rect">
+            <a:avLst/>
+          </a:prstGeom>
+          <a:noFill/>
+        </p:spPr>
+        <p:txBody>
+          <a:bodyPr wrap="square" lIns="18288" rIns="18288" tIns="18288" bIns="18288" anchor="t">
+            <a:spAutoFit/>
+          </a:bodyPr>
+          <a:lstStyle/>
+          <a:p>
+            <a:pPr algn="r">
+              <a:defRPr sz="1000" b="1">
+                <a:solidFill>
+                  <a:srgbClr val="525E71"/>
+                </a:solidFill>
+                <a:latin typeface="Aptos"/>
+              </a:defRPr>
+            </a:pPr>
+            <a:r>
+              <a:t>01</a:t>
+            </a:r>
+          </a:p>
+        </p:txBody>
+      </p:sp>
+      <p:sp>
+        <p:nvSpPr>
+          <p:cNvPr id="5" name="TextBox 4"/>
+          <p:cNvSpPr txBox="1"/>
+          <p:nvPr/>
+        </p:nvSpPr>
+        <p:spPr>
+          <a:xfrm>
+            <a:off x="566928" y="786384"/>
+            <a:ext cx="8092440" cy="749808"/>
+          </a:xfrm>
+          <a:prstGeom prst="rect">
+            <a:avLst/>
+          </a:prstGeom>
+          <a:noFill/>
+        </p:spPr>
+        <p:txBody>
+          <a:bodyPr wrap="square" lIns="18288" rIns="18288" tIns="18288" bIns="18288" anchor="t">
+            <a:spAutoFit/>
+          </a:bodyPr>
+          <a:lstStyle/>
+          <a:p>
+            <a:pPr algn="l">
+              <a:defRPr sz="2800" b="1">
+                <a:solidFill>
+                  <a:srgbClr val="111827"/>
+                </a:solidFill>
+                <a:latin typeface="Aptos"/>
+              </a:defRPr>
+            </a:pPr>
+            <a:r>
+              <a:t>Start With A Strong Hook</a:t>
+            </a:r>
+          </a:p>
+        </p:txBody>
+      </p:sp>
+      <p:sp>
+        <p:nvSpPr>
+          <p:cNvPr id="6" name="Rounded Rectangle 5"/>
+          <p:cNvSpPr/>
+          <p:nvPr/>
+        </p:nvSpPr>
+        <p:spPr>
+          <a:xfrm>
+            <a:off x="9006840" y="768096"/>
+            <a:ext cx="1508760" cy="310896"/>
+          </a:xfrm>
+          <a:prstGeom prst="roundRect">
+            <a:avLst/>
+          </a:prstGeom>
+          <a:solidFill>
+            <a:srgbClr val="F43F5E"/>
+          </a:solidFill>
+          <a:ln>
+            <a:noFill/>
+          </a:ln>
+        </p:spPr>
+        <p:style>
+          <a:lnRef idx="1">
+            <a:schemeClr val="accent1"/>
+          </a:lnRef>
+          <a:fillRef idx="3">
+            <a:schemeClr val="accent1"/>
+          </a:fillRef>
+          <a:effectRef idx="2">
+            <a:schemeClr val="accent1"/>
+          </a:effectRef>
+          <a:fontRef idx="minor">
+            <a:schemeClr val="lt1"/>
+          </a:fontRef>
+        </p:style>
+        <p:txBody>
+          <a:bodyPr rtlCol="0" anchor="ctr"/>
+          <a:lstStyle/>
+          <a:p>
+            <a:pPr algn="ctr"/>
+          </a:p>
+        </p:txBody>
+      </p:sp>
+      <p:sp>
+        <p:nvSpPr>
+          <p:cNvPr id="7" name="TextBox 6"/>
+          <p:cNvSpPr txBox="1"/>
+          <p:nvPr/>
+        </p:nvSpPr>
+        <p:spPr>
+          <a:xfrm>
+            <a:off x="9098280" y="818388"/>
+            <a:ext cx="1325880" cy="164592"/>
+          </a:xfrm>
+          <a:prstGeom prst="rect">
+            <a:avLst/>
+          </a:prstGeom>
+          <a:noFill/>
+        </p:spPr>
+        <p:txBody>
+          <a:bodyPr wrap="square" lIns="18288" rIns="18288" tIns="18288" bIns="18288" anchor="t">
+            <a:spAutoFit/>
+          </a:bodyPr>
+          <a:lstStyle/>
+          <a:p>
+            <a:pPr algn="ctr">
+              <a:defRPr sz="800" b="1">
+                <a:solidFill>
+                  <a:srgbClr val="FFFFFF"/>
+                </a:solidFill>
+                <a:latin typeface="Aptos"/>
+              </a:defRPr>
+            </a:pPr>
+            <a:r>
+              <a:t>REMEMBER</a:t>
+            </a:r>
+          </a:p>
+        </p:txBody>
+      </p:sp>
+      <p:pic>
+        <p:nvPicPr>
+          <p:cNvPr id="8" name="Picture 7" descr="image.jpg"/>
+          <p:cNvPicPr>
+            <a:picLocks noChangeAspect="1"/>
+          </p:cNvPicPr>
+          <p:nvPr/>
+        </p:nvPicPr>
+        <p:blipFill>
+          <a:blip r:embed="rId2"/>
+          <a:stretch>
+            <a:fillRect/>
+          </a:stretch>
+        </p:blipFill>
+        <p:spPr>
+          <a:xfrm>
+            <a:off x="6537960" y="1417320"/>
+            <a:ext cx="5074920" cy="4919472"/>
+          </a:xfrm>
+          <a:prstGeom prst="rect">
+            <a:avLst/>
+          </a:prstGeom>
+          <a:ln w="12700">
+            <a:solidFill>
+              <a:srgbClr val="E2E8F0"/>
+            </a:solidFill>
+          </a:ln>
+        </p:spPr>
+      </p:pic>
+      <p:sp>
+        <p:nvSpPr>
+          <p:cNvPr id="9" name="TextBox 8"/>
+          <p:cNvSpPr txBox="1"/>
+          <p:nvPr/>
+        </p:nvSpPr>
+        <p:spPr>
+          <a:xfrm>
+            <a:off x="603504" y="1682496"/>
+            <a:ext cx="5349240" cy="1143000"/>
+          </a:xfrm>
+          <a:prstGeom prst="rect">
+            <a:avLst/>
+          </a:prstGeom>
+          <a:noFill/>
+        </p:spPr>
+        <p:txBody>
+          <a:bodyPr wrap="square" lIns="18288" rIns="18288" tIns="18288" bIns="18288" anchor="t">
+            <a:spAutoFit/>
+          </a:bodyPr>
+          <a:lstStyle/>
+          <a:p>
+            <a:pPr algn="l">
+              <a:defRPr sz="2400" b="1">
+                <a:solidFill>
+                  <a:srgbClr val="111827"/>
+                </a:solidFill>
+                <a:latin typeface="Aptos"/>
+              </a:defRPr>
+            </a:pPr>
+            <a:r>
+              <a:t>Open with one curiosity question</a:t>
+            </a:r>
+          </a:p>
+        </p:txBody>
+      </p:sp>
+      <p:sp>
+        <p:nvSpPr>
+          <p:cNvPr id="10" name="TextBox 9"/>
+          <p:cNvSpPr txBox="1"/>
+          <p:nvPr/>
+        </p:nvSpPr>
+        <p:spPr>
+          <a:xfrm>
+            <a:off x="658368" y="3127248"/>
+            <a:ext cx="5120640" cy="292608"/>
+          </a:xfrm>
+          <a:prstGeom prst="rect">
+            <a:avLst/>
+          </a:prstGeom>
+          <a:noFill/>
+        </p:spPr>
+        <p:txBody>
+          <a:bodyPr wrap="square" lIns="18288" rIns="18288" tIns="18288" bIns="18288" anchor="t">
+            <a:spAutoFit/>
+          </a:bodyPr>
+          <a:lstStyle/>
+          <a:p>
+            <a:pPr algn="l">
+              <a:defRPr sz="1400" b="1">
+                <a:solidFill>
+                  <a:srgbClr val="111827"/>
+                </a:solidFill>
+                <a:latin typeface="Aptos"/>
+              </a:defRPr>
+            </a:pPr>
+            <a:r>
+              <a:t>Key Points</a:t>
+            </a:r>
+          </a:p>
+        </p:txBody>
+      </p:sp>
+      <p:sp>
+        <p:nvSpPr>
+          <p:cNvPr id="11" name="Oval 10"/>
+          <p:cNvSpPr/>
+          <p:nvPr/>
+        </p:nvSpPr>
+        <p:spPr>
+          <a:xfrm>
+            <a:off x="658368" y="3685032"/>
+            <a:ext cx="118872" cy="118872"/>
+          </a:xfrm>
+          <a:prstGeom prst="ellipse">
+            <a:avLst/>
+          </a:prstGeom>
+          <a:solidFill>
+            <a:srgbClr val="14B8A6"/>
+          </a:solidFill>
+          <a:ln>
+            <a:noFill/>
+          </a:ln>
+        </p:spPr>
+        <p:style>
+          <a:lnRef idx="1">
+            <a:schemeClr val="accent1"/>
+          </a:lnRef>
+          <a:fillRef idx="3">
+            <a:schemeClr val="accent1"/>
+          </a:fillRef>
+          <a:effectRef idx="2">
+            <a:schemeClr val="accent1"/>
+          </a:effectRef>
+          <a:fontRef idx="minor">
+            <a:schemeClr val="lt1"/>
+          </a:fontRef>
+        </p:style>
+        <p:txBody>
+          <a:bodyPr rtlCol="0" anchor="ctr"/>
+          <a:lstStyle/>
+          <a:p>
+            <a:pPr algn="ctr"/>
+          </a:p>
+        </p:txBody>
+      </p:sp>
+      <p:sp>
+        <p:nvSpPr>
+          <p:cNvPr id="12" name="TextBox 11"/>
+          <p:cNvSpPr txBox="1"/>
+          <p:nvPr/>
+        </p:nvSpPr>
+        <p:spPr>
+          <a:xfrm>
+            <a:off x="914400" y="3630168"/>
+            <a:ext cx="4846320" cy="384048"/>
+          </a:xfrm>
+          <a:prstGeom prst="rect">
+            <a:avLst/>
+          </a:prstGeom>
+          <a:noFill/>
+        </p:spPr>
+        <p:txBody>
+          <a:bodyPr wrap="square" lIns="18288" rIns="18288" tIns="18288" bIns="18288" anchor="t">
+            <a:spAutoFit/>
+          </a:bodyPr>
+          <a:lstStyle/>
+          <a:p>
+            <a:pPr algn="l">
+              <a:defRPr sz="1150" b="0">
+                <a:solidFill>
+                  <a:srgbClr val="525E71"/>
+                </a:solidFill>
+                <a:latin typeface="Aptos"/>
+              </a:defRPr>
+            </a:pPr>
+            <a:r>
+              <a:t>Name the core idea in simple language</a:t>
+            </a:r>
+          </a:p>
+        </p:txBody>
+      </p:sp>
+      <p:sp>
+        <p:nvSpPr>
+          <p:cNvPr id="13" name="Oval 12"/>
+          <p:cNvSpPr/>
+          <p:nvPr/>
+        </p:nvSpPr>
+        <p:spPr>
+          <a:xfrm>
+            <a:off x="658368" y="4142232"/>
+            <a:ext cx="118872" cy="118872"/>
+          </a:xfrm>
+          <a:prstGeom prst="ellipse">
+            <a:avLst/>
+          </a:prstGeom>
+          <a:solidFill>
+            <a:srgbClr val="14B8A6"/>
+          </a:solidFill>
+          <a:ln>
+            <a:noFill/>
+          </a:ln>
+        </p:spPr>
+        <p:style>
+          <a:lnRef idx="1">
+            <a:schemeClr val="accent1"/>
+          </a:lnRef>
+          <a:fillRef idx="3">
+            <a:schemeClr val="accent1"/>
+          </a:fillRef>
+          <a:effectRef idx="2">
+            <a:schemeClr val="accent1"/>
+          </a:effectRef>
+          <a:fontRef idx="minor">
+            <a:schemeClr val="lt1"/>
+          </a:fontRef>
+        </p:style>
+        <p:txBody>
+          <a:bodyPr rtlCol="0" anchor="ctr"/>
+          <a:lstStyle/>
+          <a:p>
+            <a:pPr algn="ctr"/>
+          </a:p>
+        </p:txBody>
+      </p:sp>
+      <p:sp>
+        <p:nvSpPr>
+          <p:cNvPr id="14" name="TextBox 13"/>
+          <p:cNvSpPr txBox="1"/>
+          <p:nvPr/>
+        </p:nvSpPr>
+        <p:spPr>
+          <a:xfrm>
+            <a:off x="914400" y="4087368"/>
+            <a:ext cx="4846320" cy="384048"/>
+          </a:xfrm>
+          <a:prstGeom prst="rect">
+            <a:avLst/>
+          </a:prstGeom>
+          <a:noFill/>
+        </p:spPr>
+        <p:txBody>
+          <a:bodyPr wrap="square" lIns="18288" rIns="18288" tIns="18288" bIns="18288" anchor="t">
+            <a:spAutoFit/>
+          </a:bodyPr>
+          <a:lstStyle/>
+          <a:p>
+            <a:pPr algn="l">
+              <a:defRPr sz="1150" b="0">
+                <a:solidFill>
+                  <a:srgbClr val="525E71"/>
+                </a:solidFill>
+                <a:latin typeface="Aptos"/>
+              </a:defRPr>
+            </a:pPr>
+            <a:r>
+              <a:t>Show why it matters beyond the textbook</a:t>
+            </a:r>
+          </a:p>
+        </p:txBody>
+      </p:sp>
+      <p:sp>
+        <p:nvSpPr>
+          <p:cNvPr id="15" name="Oval 14"/>
+          <p:cNvSpPr/>
+          <p:nvPr/>
+        </p:nvSpPr>
+        <p:spPr>
+          <a:xfrm>
+            <a:off x="658368" y="4599432"/>
+            <a:ext cx="118872" cy="118872"/>
+          </a:xfrm>
+          <a:prstGeom prst="ellipse">
+            <a:avLst/>
+          </a:prstGeom>
+          <a:solidFill>
+            <a:srgbClr val="14B8A6"/>
+          </a:solidFill>
+          <a:ln>
+            <a:noFill/>
+          </a:ln>
+        </p:spPr>
+        <p:style>
+          <a:lnRef idx="1">
+            <a:schemeClr val="accent1"/>
+          </a:lnRef>
+          <a:fillRef idx="3">
+            <a:schemeClr val="accent1"/>
+          </a:fillRef>
+          <a:effectRef idx="2">
+            <a:schemeClr val="accent1"/>
+          </a:effectRef>
+          <a:fontRef idx="minor">
+            <a:schemeClr val="lt1"/>
+          </a:fontRef>
+        </p:style>
+        <p:txBody>
+          <a:bodyPr rtlCol="0" anchor="ctr"/>
+          <a:lstStyle/>
+          <a:p>
+            <a:pPr algn="ctr"/>
+          </a:p>
+        </p:txBody>
+      </p:sp>
+      <p:sp>
+        <p:nvSpPr>
+          <p:cNvPr id="16" name="TextBox 15"/>
+          <p:cNvSpPr txBox="1"/>
+          <p:nvPr/>
+        </p:nvSpPr>
+        <p:spPr>
+          <a:xfrm>
+            <a:off x="914400" y="4544568"/>
+            <a:ext cx="4846320" cy="384048"/>
+          </a:xfrm>
+          <a:prstGeom prst="rect">
+            <a:avLst/>
+          </a:prstGeom>
+          <a:noFill/>
+        </p:spPr>
+        <p:txBody>
+          <a:bodyPr wrap="square" lIns="18288" rIns="18288" tIns="18288" bIns="18288" anchor="t">
+            <a:spAutoFit/>
+          </a:bodyPr>
+          <a:lstStyle/>
+          <a:p>
+            <a:pPr algn="l">
+              <a:defRPr sz="1150" b="0">
+                <a:solidFill>
+                  <a:srgbClr val="525E71"/>
+                </a:solidFill>
+                <a:latin typeface="Aptos"/>
+              </a:defRPr>
+            </a:pPr>
+            <a:r>
+              <a:t>Preview what students will be able to do</a:t>
+            </a:r>
+          </a:p>
+        </p:txBody>
+      </p:sp>
+    </p:spTree>
+  </p:cSld>
+  <p:clrMapOvr>
+    <a:masterClrMapping/>
+  </p:clrMapOvr>
+</p:sld>
+</file>
+
+<file path=ppt/slides/slide3.xml><?xml version="1.0" encoding="utf-8"?>
+<p:sld xmlns:a="http://schemas.openxmlformats.org/drawingml/2006/main" xmlns:p="http://schemas.openxmlformats.org/presentationml/2006/main" xmlns:r="http://schemas.openxmlformats.org/officeDocument/2006/relationships">
+  <p:cSld>
+    <p:bg>
+      <p:bgPr>
+        <a:solidFill>
+          <a:srgbClr val="F8FAFC"/>
+        </a:solidFill>
+        <a:effectLst/>
+      </p:bgPr>
+    </p:bg>
+    <p:spTree>
+      <p:nvGrpSpPr>
+        <p:cNvPr id="1" name=""/>
+        <p:cNvGrpSpPr/>
+        <p:nvPr/>
+      </p:nvGrpSpPr>
+      <p:grpSpPr/>
+      <p:sp>
+        <p:nvSpPr>
+          <p:cNvPr id="2" name="Rounded Rectangle 1"/>
+          <p:cNvSpPr/>
+          <p:nvPr/>
+        </p:nvSpPr>
+        <p:spPr>
+          <a:xfrm>
+            <a:off x="566928" y="347472"/>
+            <a:ext cx="1005840" cy="310896"/>
+          </a:xfrm>
+          <a:prstGeom prst="roundRect">
+            <a:avLst/>
+          </a:prstGeom>
+          <a:solidFill>
+            <a:srgbClr val="14B8A6"/>
+          </a:solidFill>
+          <a:ln>
+            <a:noFill/>
+          </a:ln>
+        </p:spPr>
+        <p:style>
+          <a:lnRef idx="1">
+            <a:schemeClr val="accent1"/>
+          </a:lnRef>
+          <a:fillRef idx="3">
+            <a:schemeClr val="accent1"/>
+          </a:fillRef>
+          <a:effectRef idx="2">
+            <a:schemeClr val="accent1"/>
+          </a:effectRef>
+          <a:fontRef idx="minor">
+            <a:schemeClr val="lt1"/>
+          </a:fontRef>
+        </p:style>
+        <p:txBody>
+          <a:bodyPr rtlCol="0" anchor="ctr"/>
+          <a:lstStyle/>
+          <a:p>
+            <a:pPr algn="ctr"/>
+          </a:p>
+        </p:txBody>
+      </p:sp>
+      <p:sp>
+        <p:nvSpPr>
+          <p:cNvPr id="3" name="TextBox 2"/>
+          <p:cNvSpPr txBox="1"/>
+          <p:nvPr/>
+        </p:nvSpPr>
+        <p:spPr>
+          <a:xfrm>
+            <a:off x="658368" y="397764"/>
+            <a:ext cx="822960" cy="164592"/>
+          </a:xfrm>
+          <a:prstGeom prst="rect">
+            <a:avLst/>
+          </a:prstGeom>
+          <a:noFill/>
+        </p:spPr>
+        <p:txBody>
+          <a:bodyPr wrap="square" lIns="18288" rIns="18288" tIns="18288" bIns="18288" anchor="t">
+            <a:spAutoFit/>
+          </a:bodyPr>
+          <a:lstStyle/>
+          <a:p>
+            <a:pPr algn="ctr">
+              <a:defRPr sz="800" b="1">
+                <a:solidFill>
+                  <a:srgbClr val="FFFFFF"/>
+                </a:solidFill>
+                <a:latin typeface="Aptos"/>
+              </a:defRPr>
+            </a:pPr>
+            <a:r>
+              <a:t>CONCEPT</a:t>
+            </a:r>
+          </a:p>
+        </p:txBody>
+      </p:sp>
+      <p:sp>
+        <p:nvSpPr>
+          <p:cNvPr id="4" name="TextBox 3"/>
+          <p:cNvSpPr txBox="1"/>
+          <p:nvPr/>
+        </p:nvSpPr>
+        <p:spPr>
+          <a:xfrm>
+            <a:off x="10881360" y="347472"/>
+            <a:ext cx="502920" cy="228600"/>
+          </a:xfrm>
+          <a:prstGeom prst="rect">
+            <a:avLst/>
+          </a:prstGeom>
+          <a:noFill/>
+        </p:spPr>
+        <p:txBody>
+          <a:bodyPr wrap="square" lIns="18288" rIns="18288" tIns="18288" bIns="18288" anchor="t">
+            <a:spAutoFit/>
+          </a:bodyPr>
+          <a:lstStyle/>
+          <a:p>
+            <a:pPr algn="r">
+              <a:defRPr sz="1000" b="1">
+                <a:solidFill>
+                  <a:srgbClr val="525E71"/>
+                </a:solidFill>
+                <a:latin typeface="Aptos"/>
+              </a:defRPr>
+            </a:pPr>
+            <a:r>
+              <a:t>02</a:t>
+            </a:r>
+          </a:p>
+        </p:txBody>
+      </p:sp>
+      <p:sp>
+        <p:nvSpPr>
+          <p:cNvPr id="5" name="TextBox 4"/>
+          <p:cNvSpPr txBox="1"/>
+          <p:nvPr/>
+        </p:nvSpPr>
+        <p:spPr>
+          <a:xfrm>
+            <a:off x="566928" y="786384"/>
+            <a:ext cx="8092440" cy="749808"/>
+          </a:xfrm>
+          <a:prstGeom prst="rect">
+            <a:avLst/>
+          </a:prstGeom>
+          <a:noFill/>
+        </p:spPr>
+        <p:txBody>
+          <a:bodyPr wrap="square" lIns="18288" rIns="18288" tIns="18288" bIns="18288" anchor="t">
+            <a:spAutoFit/>
+          </a:bodyPr>
+          <a:lstStyle/>
+          <a:p>
+            <a:pPr algn="l">
+              <a:defRPr sz="3200" b="1">
+                <a:solidFill>
+                  <a:srgbClr val="111827"/>
+                </a:solidFill>
+                <a:latin typeface="Aptos"/>
+              </a:defRPr>
+            </a:pPr>
+            <a:r>
+              <a:t>Make The Core Idea Visible</a:t>
+            </a:r>
+          </a:p>
+        </p:txBody>
+      </p:sp>
+      <p:sp>
+        <p:nvSpPr>
+          <p:cNvPr id="6" name="Rounded Rectangle 5"/>
+          <p:cNvSpPr/>
+          <p:nvPr/>
+        </p:nvSpPr>
+        <p:spPr>
+          <a:xfrm>
+            <a:off x="9006840" y="768096"/>
+            <a:ext cx="1508760" cy="310896"/>
+          </a:xfrm>
+          <a:prstGeom prst="roundRect">
+            <a:avLst/>
+          </a:prstGeom>
+          <a:solidFill>
+            <a:srgbClr val="F43F5E"/>
+          </a:solidFill>
+          <a:ln>
+            <a:noFill/>
+          </a:ln>
+        </p:spPr>
+        <p:style>
+          <a:lnRef idx="1">
+            <a:schemeClr val="accent1"/>
+          </a:lnRef>
+          <a:fillRef idx="3">
+            <a:schemeClr val="accent1"/>
+          </a:fillRef>
+          <a:effectRef idx="2">
+            <a:schemeClr val="accent1"/>
+          </a:effectRef>
+          <a:fontRef idx="minor">
+            <a:schemeClr val="lt1"/>
+          </a:fontRef>
+        </p:style>
+        <p:txBody>
+          <a:bodyPr rtlCol="0" anchor="ctr"/>
+          <a:lstStyle/>
+          <a:p>
+            <a:pPr algn="ctr"/>
+          </a:p>
+        </p:txBody>
+      </p:sp>
+      <p:sp>
+        <p:nvSpPr>
+          <p:cNvPr id="7" name="TextBox 6"/>
+          <p:cNvSpPr txBox="1"/>
+          <p:nvPr/>
+        </p:nvSpPr>
+        <p:spPr>
+          <a:xfrm>
+            <a:off x="9098280" y="818388"/>
+            <a:ext cx="1325880" cy="164592"/>
+          </a:xfrm>
+          <a:prstGeom prst="rect">
+            <a:avLst/>
+          </a:prstGeom>
+          <a:noFill/>
+        </p:spPr>
+        <p:txBody>
+          <a:bodyPr wrap="square" lIns="18288" rIns="18288" tIns="18288" bIns="18288" anchor="t">
+            <a:spAutoFit/>
+          </a:bodyPr>
+          <a:lstStyle/>
+          <a:p>
+            <a:pPr algn="ctr">
+              <a:defRPr sz="800" b="1">
+                <a:solidFill>
+                  <a:srgbClr val="FFFFFF"/>
+                </a:solidFill>
+                <a:latin typeface="Aptos"/>
+              </a:defRPr>
+            </a:pPr>
+            <a:r>
+              <a:t>UNDERSTAND</a:t>
+            </a:r>
+          </a:p>
+        </p:txBody>
+      </p:sp>
+      <p:sp>
+        <p:nvSpPr>
+          <p:cNvPr id="8" name="Rounded Rectangle 7"/>
+          <p:cNvSpPr/>
+          <p:nvPr/>
+        </p:nvSpPr>
+        <p:spPr>
+          <a:xfrm>
+            <a:off x="566928" y="1847088"/>
+            <a:ext cx="4023360" cy="3794760"/>
+          </a:xfrm>
+          <a:prstGeom prst="roundRect">
+            <a:avLst/>
+          </a:prstGeom>
+          <a:solidFill>
+            <a:srgbClr val="FFFFFF"/>
+          </a:solidFill>
+          <a:ln w="12700">
+            <a:solidFill>
+              <a:srgbClr val="E2E8F0"/>
+            </a:solidFill>
+          </a:ln>
+        </p:spPr>
+        <p:style>
+          <a:lnRef idx="1">
+            <a:schemeClr val="accent1"/>
+          </a:lnRef>
+          <a:fillRef idx="3">
+            <a:schemeClr val="accent1"/>
+          </a:fillRef>
+          <a:effectRef idx="2">
+            <a:schemeClr val="accent1"/>
+          </a:effectRef>
+          <a:fontRef idx="minor">
+            <a:schemeClr val="lt1"/>
+          </a:fontRef>
+        </p:style>
+        <p:txBody>
+          <a:bodyPr rtlCol="0" anchor="ctr"/>
+          <a:lstStyle/>
+          <a:p>
+            <a:pPr algn="ctr"/>
+          </a:p>
+        </p:txBody>
+      </p:sp>
+      <p:sp>
+        <p:nvSpPr>
+          <p:cNvPr id="9" name="TextBox 8"/>
+          <p:cNvSpPr txBox="1"/>
+          <p:nvPr/>
+        </p:nvSpPr>
+        <p:spPr>
+          <a:xfrm>
+            <a:off x="914400" y="2212848"/>
+            <a:ext cx="3310128" cy="1417320"/>
+          </a:xfrm>
+          <a:prstGeom prst="rect">
+            <a:avLst/>
+          </a:prstGeom>
+          <a:noFill/>
+        </p:spPr>
+        <p:txBody>
+          <a:bodyPr wrap="square" lIns="18288" rIns="18288" tIns="18288" bIns="18288" anchor="t">
+            <a:spAutoFit/>
+          </a:bodyPr>
+          <a:lstStyle/>
+          <a:p>
+            <a:pPr algn="l">
+              <a:defRPr sz="2300" b="1">
+                <a:solidFill>
+                  <a:srgbClr val="111827"/>
+                </a:solidFill>
+                <a:latin typeface="Aptos"/>
+              </a:defRPr>
+            </a:pPr>
+            <a:r>
+              <a:t>Teach one key idea per slide</a:t>
+            </a:r>
+          </a:p>
+        </p:txBody>
+      </p:sp>
+      <p:sp>
+        <p:nvSpPr>
+          <p:cNvPr id="10" name="TextBox 9"/>
+          <p:cNvSpPr txBox="1"/>
+          <p:nvPr/>
+        </p:nvSpPr>
+        <p:spPr>
+          <a:xfrm>
+            <a:off x="914400" y="3822191"/>
+            <a:ext cx="3291840" cy="749808"/>
+          </a:xfrm>
+          <a:prstGeom prst="rect">
+            <a:avLst/>
+          </a:prstGeom>
+          <a:noFill/>
+        </p:spPr>
+        <p:txBody>
+          <a:bodyPr wrap="square" lIns="18288" rIns="18288" tIns="18288" bIns="18288" anchor="t">
+            <a:spAutoFit/>
+          </a:bodyPr>
+          <a:lstStyle/>
+          <a:p>
+            <a:pPr algn="l">
+              <a:defRPr sz="1400" b="0">
+                <a:solidFill>
+                  <a:srgbClr val="525E71"/>
+                </a:solidFill>
+                <a:latin typeface="Aptos"/>
+              </a:defRPr>
+            </a:pPr>
+            <a:r>
+              <a:t>Explain a concept with a visual anchor.</a:t>
+            </a:r>
+          </a:p>
+        </p:txBody>
+      </p:sp>
+      <p:sp>
+        <p:nvSpPr>
+          <p:cNvPr id="11" name="Rectangle 10"/>
+          <p:cNvSpPr/>
+          <p:nvPr/>
+        </p:nvSpPr>
+        <p:spPr>
+          <a:xfrm>
+            <a:off x="896112" y="4864608"/>
+            <a:ext cx="1115568" cy="73152"/>
+          </a:xfrm>
+          <a:prstGeom prst="rect">
+            <a:avLst/>
+          </a:prstGeom>
+          <a:solidFill>
+            <a:srgbClr val="14B8A6"/>
+          </a:solidFill>
+          <a:ln>
+            <a:noFill/>
+          </a:ln>
+        </p:spPr>
+        <p:style>
+          <a:lnRef idx="1">
+            <a:schemeClr val="accent1"/>
+          </a:lnRef>
+          <a:fillRef idx="3">
+            <a:schemeClr val="accent1"/>
+          </a:fillRef>
+          <a:effectRef idx="2">
+            <a:schemeClr val="accent1"/>
+          </a:effectRef>
+          <a:fontRef idx="minor">
+            <a:schemeClr val="lt1"/>
+          </a:fontRef>
+        </p:style>
+        <p:txBody>
+          <a:bodyPr rtlCol="0" anchor="ctr"/>
+          <a:lstStyle/>
+          <a:p>
+            <a:pPr algn="ctr"/>
+          </a:p>
+        </p:txBody>
+      </p:sp>
+      <p:sp>
+        <p:nvSpPr>
+          <p:cNvPr id="12" name="Rounded Rectangle 11"/>
+          <p:cNvSpPr/>
+          <p:nvPr/>
+        </p:nvSpPr>
+        <p:spPr>
+          <a:xfrm>
+            <a:off x="4937760" y="1847088"/>
+            <a:ext cx="6629400" cy="3794760"/>
+          </a:xfrm>
+          <a:prstGeom prst="roundRect">
+            <a:avLst/>
+          </a:prstGeom>
+          <a:solidFill>
+            <a:srgbClr val="FFFFFF"/>
+          </a:solidFill>
+          <a:ln w="12700">
+            <a:solidFill>
+              <a:srgbClr val="E2E8F0"/>
+            </a:solidFill>
+          </a:ln>
+        </p:spPr>
+        <p:style>
+          <a:lnRef idx="1">
+            <a:schemeClr val="accent1"/>
+          </a:lnRef>
+          <a:fillRef idx="3">
+            <a:schemeClr val="accent1"/>
+          </a:fillRef>
+          <a:effectRef idx="2">
+            <a:schemeClr val="accent1"/>
+          </a:effectRef>
+          <a:fontRef idx="minor">
+            <a:schemeClr val="lt1"/>
+          </a:fontRef>
+        </p:style>
+        <p:txBody>
+          <a:bodyPr rtlCol="0" anchor="ctr"/>
+          <a:lstStyle/>
+          <a:p>
+            <a:pPr algn="ctr"/>
+          </a:p>
+        </p:txBody>
+      </p:sp>
+      <p:sp>
+        <p:nvSpPr>
+          <p:cNvPr id="13" name="TextBox 12"/>
+          <p:cNvSpPr txBox="1"/>
+          <p:nvPr/>
+        </p:nvSpPr>
+        <p:spPr>
+          <a:xfrm>
+            <a:off x="5376672" y="2221992"/>
+            <a:ext cx="5623560" cy="292608"/>
+          </a:xfrm>
+          <a:prstGeom prst="rect">
+            <a:avLst/>
+          </a:prstGeom>
+          <a:noFill/>
+        </p:spPr>
+        <p:txBody>
+          <a:bodyPr wrap="square" lIns="18288" rIns="18288" tIns="18288" bIns="18288" anchor="t">
+            <a:spAutoFit/>
+          </a:bodyPr>
+          <a:lstStyle/>
+          <a:p>
+            <a:pPr algn="l">
+              <a:defRPr sz="1400" b="1">
+                <a:solidFill>
+                  <a:srgbClr val="111827"/>
+                </a:solidFill>
+                <a:latin typeface="Aptos"/>
+              </a:defRPr>
+            </a:pPr>
+            <a:r>
+              <a:t>What students should notice</a:t>
+            </a:r>
+          </a:p>
+        </p:txBody>
+      </p:sp>
+      <p:sp>
+        <p:nvSpPr>
+          <p:cNvPr id="14" name="Oval 13"/>
+          <p:cNvSpPr/>
+          <p:nvPr/>
+        </p:nvSpPr>
+        <p:spPr>
+          <a:xfrm>
+            <a:off x="5376672" y="2779776"/>
+            <a:ext cx="118872" cy="118872"/>
+          </a:xfrm>
+          <a:prstGeom prst="ellipse">
+            <a:avLst/>
+          </a:prstGeom>
+          <a:solidFill>
+            <a:srgbClr val="14B8A6"/>
+          </a:solidFill>
+          <a:ln>
+            <a:noFill/>
+          </a:ln>
+        </p:spPr>
+        <p:style>
+          <a:lnRef idx="1">
+            <a:schemeClr val="accent1"/>
+          </a:lnRef>
+          <a:fillRef idx="3">
+            <a:schemeClr val="accent1"/>
+          </a:fillRef>
+          <a:effectRef idx="2">
+            <a:schemeClr val="accent1"/>
+          </a:effectRef>
+          <a:fontRef idx="minor">
+            <a:schemeClr val="lt1"/>
+          </a:fontRef>
+        </p:style>
+        <p:txBody>
+          <a:bodyPr rtlCol="0" anchor="ctr"/>
+          <a:lstStyle/>
+          <a:p>
+            <a:pPr algn="ctr"/>
+          </a:p>
+        </p:txBody>
+      </p:sp>
+      <p:sp>
+        <p:nvSpPr>
+          <p:cNvPr id="15" name="TextBox 14"/>
+          <p:cNvSpPr txBox="1"/>
+          <p:nvPr/>
+        </p:nvSpPr>
+        <p:spPr>
+          <a:xfrm>
+            <a:off x="5632704" y="2724912"/>
+            <a:ext cx="5349240" cy="384048"/>
+          </a:xfrm>
+          <a:prstGeom prst="rect">
+            <a:avLst/>
+          </a:prstGeom>
+          <a:noFill/>
+        </p:spPr>
+        <p:txBody>
+          <a:bodyPr wrap="square" lIns="18288" rIns="18288" tIns="18288" bIns="18288" anchor="t">
+            <a:spAutoFit/>
+          </a:bodyPr>
+          <a:lstStyle/>
+          <a:p>
+            <a:pPr algn="l">
+              <a:defRPr sz="1150" b="0">
+                <a:solidFill>
+                  <a:srgbClr val="525E71"/>
+                </a:solidFill>
+                <a:latin typeface="Aptos"/>
+              </a:defRPr>
+            </a:pPr>
+            <a:r>
+              <a:t>Pair the idea with an example or analogy</a:t>
+            </a:r>
+          </a:p>
+        </p:txBody>
+      </p:sp>
+      <p:sp>
+        <p:nvSpPr>
+          <p:cNvPr id="16" name="Oval 15"/>
+          <p:cNvSpPr/>
+          <p:nvPr/>
+        </p:nvSpPr>
+        <p:spPr>
+          <a:xfrm>
+            <a:off x="5376672" y="3236976"/>
+            <a:ext cx="118872" cy="118872"/>
+          </a:xfrm>
+          <a:prstGeom prst="ellipse">
+            <a:avLst/>
+          </a:prstGeom>
+          <a:solidFill>
+            <a:srgbClr val="14B8A6"/>
+          </a:solidFill>
+          <a:ln>
+            <a:noFill/>
+          </a:ln>
+        </p:spPr>
+        <p:style>
+          <a:lnRef idx="1">
+            <a:schemeClr val="accent1"/>
+          </a:lnRef>
+          <a:fillRef idx="3">
+            <a:schemeClr val="accent1"/>
+          </a:fillRef>
+          <a:effectRef idx="2">
+            <a:schemeClr val="accent1"/>
+          </a:effectRef>
+          <a:fontRef idx="minor">
+            <a:schemeClr val="lt1"/>
+          </a:fontRef>
+        </p:style>
+        <p:txBody>
+          <a:bodyPr rtlCol="0" anchor="ctr"/>
+          <a:lstStyle/>
+          <a:p>
+            <a:pPr algn="ctr"/>
+          </a:p>
+        </p:txBody>
+      </p:sp>
+      <p:sp>
+        <p:nvSpPr>
+          <p:cNvPr id="17" name="TextBox 16"/>
+          <p:cNvSpPr txBox="1"/>
+          <p:nvPr/>
+        </p:nvSpPr>
+        <p:spPr>
+          <a:xfrm>
+            <a:off x="5632704" y="3182112"/>
+            <a:ext cx="5349240" cy="384048"/>
+          </a:xfrm>
+          <a:prstGeom prst="rect">
+            <a:avLst/>
+          </a:prstGeom>
+          <a:noFill/>
+        </p:spPr>
+        <p:txBody>
+          <a:bodyPr wrap="square" lIns="18288" rIns="18288" tIns="18288" bIns="18288" anchor="t">
+            <a:spAutoFit/>
+          </a:bodyPr>
+          <a:lstStyle/>
+          <a:p>
+            <a:pPr algn="l">
+              <a:defRPr sz="1150" b="0">
+                <a:solidFill>
+                  <a:srgbClr val="525E71"/>
+                </a:solidFill>
+                <a:latin typeface="Aptos"/>
+              </a:defRPr>
+            </a:pPr>
+            <a:r>
+              <a:t>Call out one misconception early</a:t>
+            </a:r>
+          </a:p>
+        </p:txBody>
+      </p:sp>
+      <p:sp>
+        <p:nvSpPr>
+          <p:cNvPr id="18" name="Oval 17"/>
+          <p:cNvSpPr/>
+          <p:nvPr/>
+        </p:nvSpPr>
+        <p:spPr>
+          <a:xfrm>
+            <a:off x="5376672" y="3694176"/>
+            <a:ext cx="118872" cy="118872"/>
+          </a:xfrm>
+          <a:prstGeom prst="ellipse">
+            <a:avLst/>
+          </a:prstGeom>
+          <a:solidFill>
+            <a:srgbClr val="14B8A6"/>
+          </a:solidFill>
+          <a:ln>
+            <a:noFill/>
+          </a:ln>
+        </p:spPr>
+        <p:style>
+          <a:lnRef idx="1">
+            <a:schemeClr val="accent1"/>
+          </a:lnRef>
+          <a:fillRef idx="3">
+            <a:schemeClr val="accent1"/>
+          </a:fillRef>
+          <a:effectRef idx="2">
+            <a:schemeClr val="accent1"/>
+          </a:effectRef>
+          <a:fontRef idx="minor">
+            <a:schemeClr val="lt1"/>
+          </a:fontRef>
+        </p:style>
+        <p:txBody>
+          <a:bodyPr rtlCol="0" anchor="ctr"/>
+          <a:lstStyle/>
+          <a:p>
+            <a:pPr algn="ctr"/>
+          </a:p>
+        </p:txBody>
+      </p:sp>
+      <p:sp>
+        <p:nvSpPr>
+          <p:cNvPr id="19" name="TextBox 18"/>
+          <p:cNvSpPr txBox="1"/>
+          <p:nvPr/>
+        </p:nvSpPr>
+        <p:spPr>
+          <a:xfrm>
+            <a:off x="5632704" y="3639312"/>
+            <a:ext cx="5349240" cy="384048"/>
+          </a:xfrm>
+          <a:prstGeom prst="rect">
+            <a:avLst/>
+          </a:prstGeom>
+          <a:noFill/>
+        </p:spPr>
+        <p:txBody>
+          <a:bodyPr wrap="square" lIns="18288" rIns="18288" tIns="18288" bIns="18288" anchor="t">
+            <a:spAutoFit/>
+          </a:bodyPr>
+          <a:lstStyle/>
+          <a:p>
+            <a:pPr algn="l">
+              <a:defRPr sz="1150" b="0">
+                <a:solidFill>
+                  <a:srgbClr val="525E71"/>
+                </a:solidFill>
+                <a:latin typeface="Aptos"/>
+              </a:defRPr>
+            </a:pPr>
+            <a:r>
+              <a:t>End with a quick check question</a:t>
+            </a:r>
+          </a:p>
+        </p:txBody>
+      </p:sp>
+    </p:spTree>
+  </p:cSld>
+  <p:clrMapOvr>
+    <a:masterClrMapping/>
+  </p:clrMapOvr>
+</p:sld>
+</file>
+
+<file path=ppt/slides/slide4.xml><?xml version="1.0" encoding="utf-8"?>
+<p:sld xmlns:a="http://schemas.openxmlformats.org/drawingml/2006/main" xmlns:p="http://schemas.openxmlformats.org/presentationml/2006/main" xmlns:r="http://schemas.openxmlformats.org/officeDocument/2006/relationships">
+  <p:cSld>
+    <p:bg>
+      <p:bgPr>
+        <a:solidFill>
+          <a:srgbClr val="F8FAFC"/>
+        </a:solidFill>
+        <a:effectLst/>
+      </p:bgPr>
+    </p:bg>
+    <p:spTree>
+      <p:nvGrpSpPr>
+        <p:cNvPr id="1" name=""/>
+        <p:cNvGrpSpPr/>
+        <p:nvPr/>
+      </p:nvGrpSpPr>
+      <p:grpSpPr/>
+      <p:sp>
+        <p:nvSpPr>
+          <p:cNvPr id="2" name="Rounded Rectangle 1"/>
+          <p:cNvSpPr/>
+          <p:nvPr/>
+        </p:nvSpPr>
+        <p:spPr>
+          <a:xfrm>
+            <a:off x="566928" y="347472"/>
+            <a:ext cx="1005840" cy="310896"/>
+          </a:xfrm>
+          <a:prstGeom prst="roundRect">
+            <a:avLst/>
+          </a:prstGeom>
+          <a:solidFill>
+            <a:srgbClr val="14B8A6"/>
+          </a:solidFill>
+          <a:ln>
+            <a:noFill/>
+          </a:ln>
+        </p:spPr>
+        <p:style>
+          <a:lnRef idx="1">
+            <a:schemeClr val="accent1"/>
+          </a:lnRef>
+          <a:fillRef idx="3">
+            <a:schemeClr val="accent1"/>
+          </a:fillRef>
+          <a:effectRef idx="2">
+            <a:schemeClr val="accent1"/>
+          </a:effectRef>
+          <a:fontRef idx="minor">
+            <a:schemeClr val="lt1"/>
+          </a:fontRef>
+        </p:style>
+        <p:txBody>
+          <a:bodyPr rtlCol="0" anchor="ctr"/>
+          <a:lstStyle/>
+          <a:p>
+            <a:pPr algn="ctr"/>
+          </a:p>
+        </p:txBody>
+      </p:sp>
+      <p:sp>
+        <p:nvSpPr>
+          <p:cNvPr id="3" name="TextBox 2"/>
+          <p:cNvSpPr txBox="1"/>
+          <p:nvPr/>
+        </p:nvSpPr>
+        <p:spPr>
+          <a:xfrm>
+            <a:off x="658368" y="397764"/>
+            <a:ext cx="822960" cy="164592"/>
+          </a:xfrm>
+          <a:prstGeom prst="rect">
+            <a:avLst/>
+          </a:prstGeom>
+          <a:noFill/>
+        </p:spPr>
+        <p:txBody>
+          <a:bodyPr wrap="square" lIns="18288" rIns="18288" tIns="18288" bIns="18288" anchor="t">
+            <a:spAutoFit/>
+          </a:bodyPr>
+          <a:lstStyle/>
+          <a:p>
+            <a:pPr algn="ctr">
+              <a:defRPr sz="800" b="1">
+                <a:solidFill>
+                  <a:srgbClr val="FFFFFF"/>
+                </a:solidFill>
+                <a:latin typeface="Aptos"/>
+              </a:defRPr>
+            </a:pPr>
+            <a:r>
+              <a:t>ACTIVITY</a:t>
+            </a:r>
+          </a:p>
+        </p:txBody>
+      </p:sp>
+      <p:sp>
+        <p:nvSpPr>
+          <p:cNvPr id="4" name="TextBox 3"/>
+          <p:cNvSpPr txBox="1"/>
+          <p:nvPr/>
+        </p:nvSpPr>
+        <p:spPr>
+          <a:xfrm>
+            <a:off x="10881360" y="347472"/>
+            <a:ext cx="502920" cy="228600"/>
+          </a:xfrm>
+          <a:prstGeom prst="rect">
+            <a:avLst/>
+          </a:prstGeom>
+          <a:noFill/>
+        </p:spPr>
+        <p:txBody>
+          <a:bodyPr wrap="square" lIns="18288" rIns="18288" tIns="18288" bIns="18288" anchor="t">
+            <a:spAutoFit/>
+          </a:bodyPr>
+          <a:lstStyle/>
+          <a:p>
+            <a:pPr algn="r">
+              <a:defRPr sz="1000" b="1">
+                <a:solidFill>
+                  <a:srgbClr val="525E71"/>
+                </a:solidFill>
+                <a:latin typeface="Aptos"/>
+              </a:defRPr>
+            </a:pPr>
+            <a:r>
+              <a:t>03</a:t>
+            </a:r>
+          </a:p>
+        </p:txBody>
+      </p:sp>
+      <p:sp>
+        <p:nvSpPr>
+          <p:cNvPr id="5" name="TextBox 4"/>
+          <p:cNvSpPr txBox="1"/>
+          <p:nvPr/>
+        </p:nvSpPr>
+        <p:spPr>
+          <a:xfrm>
+            <a:off x="566928" y="786384"/>
+            <a:ext cx="8092440" cy="749808"/>
+          </a:xfrm>
+          <a:prstGeom prst="rect">
+            <a:avLst/>
+          </a:prstGeom>
+          <a:noFill/>
+        </p:spPr>
+        <p:txBody>
+          <a:bodyPr wrap="square" lIns="18288" rIns="18288" tIns="18288" bIns="18288" anchor="t">
+            <a:spAutoFit/>
+          </a:bodyPr>
+          <a:lstStyle/>
+          <a:p>
+            <a:pPr algn="l">
+              <a:defRPr sz="2800" b="1">
+                <a:solidFill>
+                  <a:srgbClr val="111827"/>
+                </a:solidFill>
+                <a:latin typeface="Aptos"/>
+              </a:defRPr>
+            </a:pPr>
+            <a:r>
+              <a:t>Practice With Feedback</a:t>
+            </a:r>
+          </a:p>
+        </p:txBody>
+      </p:sp>
+      <p:sp>
+        <p:nvSpPr>
+          <p:cNvPr id="6" name="Rounded Rectangle 5"/>
+          <p:cNvSpPr/>
+          <p:nvPr/>
+        </p:nvSpPr>
+        <p:spPr>
+          <a:xfrm>
+            <a:off x="9006840" y="768096"/>
+            <a:ext cx="1508760" cy="310896"/>
+          </a:xfrm>
+          <a:prstGeom prst="roundRect">
+            <a:avLst/>
+          </a:prstGeom>
+          <a:solidFill>
+            <a:srgbClr val="F43F5E"/>
+          </a:solidFill>
+          <a:ln>
+            <a:noFill/>
+          </a:ln>
+        </p:spPr>
+        <p:style>
+          <a:lnRef idx="1">
+            <a:schemeClr val="accent1"/>
+          </a:lnRef>
+          <a:fillRef idx="3">
+            <a:schemeClr val="accent1"/>
+          </a:fillRef>
+          <a:effectRef idx="2">
+            <a:schemeClr val="accent1"/>
+          </a:effectRef>
+          <a:fontRef idx="minor">
+            <a:schemeClr val="lt1"/>
+          </a:fontRef>
+        </p:style>
+        <p:txBody>
+          <a:bodyPr rtlCol="0" anchor="ctr"/>
+          <a:lstStyle/>
+          <a:p>
+            <a:pPr algn="ctr"/>
+          </a:p>
+        </p:txBody>
+      </p:sp>
+      <p:sp>
+        <p:nvSpPr>
+          <p:cNvPr id="7" name="TextBox 6"/>
+          <p:cNvSpPr txBox="1"/>
+          <p:nvPr/>
+        </p:nvSpPr>
+        <p:spPr>
+          <a:xfrm>
+            <a:off x="9098280" y="818388"/>
+            <a:ext cx="1325880" cy="164592"/>
+          </a:xfrm>
+          <a:prstGeom prst="rect">
+            <a:avLst/>
+          </a:prstGeom>
+          <a:noFill/>
+        </p:spPr>
+        <p:txBody>
+          <a:bodyPr wrap="square" lIns="18288" rIns="18288" tIns="18288" bIns="18288" anchor="t">
+            <a:spAutoFit/>
+          </a:bodyPr>
+          <a:lstStyle/>
+          <a:p>
+            <a:pPr algn="ctr">
+              <a:defRPr sz="800" b="1">
+                <a:solidFill>
+                  <a:srgbClr val="FFFFFF"/>
+                </a:solidFill>
+                <a:latin typeface="Aptos"/>
+              </a:defRPr>
+            </a:pPr>
+            <a:r>
+              <a:t>APPLY</a:t>
+            </a:r>
+          </a:p>
+        </p:txBody>
+      </p:sp>
+      <p:sp>
+        <p:nvSpPr>
+          <p:cNvPr id="8" name="Rounded Rectangle 7"/>
+          <p:cNvSpPr/>
+          <p:nvPr/>
+        </p:nvSpPr>
+        <p:spPr>
+          <a:xfrm>
+            <a:off x="566928" y="1664208"/>
+            <a:ext cx="10972800" cy="1417320"/>
+          </a:xfrm>
+          <a:prstGeom prst="roundRect">
+            <a:avLst/>
+          </a:prstGeom>
+          <a:solidFill>
+            <a:srgbClr val="FFFFFF"/>
+          </a:solidFill>
+          <a:ln w="12700">
+            <a:solidFill>
+              <a:srgbClr val="E2E8F0"/>
+            </a:solidFill>
+          </a:ln>
+        </p:spPr>
+        <p:style>
+          <a:lnRef idx="1">
+            <a:schemeClr val="accent1"/>
+          </a:lnRef>
+          <a:fillRef idx="3">
+            <a:schemeClr val="accent1"/>
+          </a:fillRef>
+          <a:effectRef idx="2">
+            <a:schemeClr val="accent1"/>
+          </a:effectRef>
+          <a:fontRef idx="minor">
+            <a:schemeClr val="lt1"/>
+          </a:fontRef>
+        </p:style>
+        <p:txBody>
+          <a:bodyPr rtlCol="0" anchor="ctr"/>
+          <a:lstStyle/>
+          <a:p>
+            <a:pPr algn="ctr"/>
+          </a:p>
+        </p:txBody>
+      </p:sp>
+      <p:sp>
+        <p:nvSpPr>
+          <p:cNvPr id="9" name="TextBox 8"/>
+          <p:cNvSpPr txBox="1"/>
+          <p:nvPr/>
+        </p:nvSpPr>
+        <p:spPr>
+          <a:xfrm>
+            <a:off x="932688" y="1956816"/>
+            <a:ext cx="10195560" cy="749808"/>
+          </a:xfrm>
+          <a:prstGeom prst="rect">
+            <a:avLst/>
+          </a:prstGeom>
+          <a:noFill/>
+        </p:spPr>
+        <p:txBody>
+          <a:bodyPr wrap="square" lIns="18288" rIns="18288" tIns="18288" bIns="18288" anchor="t">
+            <a:spAutoFit/>
+          </a:bodyPr>
+          <a:lstStyle/>
+          <a:p>
+            <a:pPr algn="l">
+              <a:defRPr sz="2300" b="1">
+                <a:solidFill>
+                  <a:srgbClr val="111827"/>
+                </a:solidFill>
+                <a:latin typeface="Aptos"/>
+              </a:defRPr>
+            </a:pPr>
+            <a:r>
+              <a:t>Question: Which option best explains the idea?</a:t>
+            </a:r>
+          </a:p>
+        </p:txBody>
+      </p:sp>
+      <p:sp>
+        <p:nvSpPr>
+          <p:cNvPr id="10" name="Rounded Rectangle 9"/>
+          <p:cNvSpPr/>
+          <p:nvPr/>
+        </p:nvSpPr>
+        <p:spPr>
+          <a:xfrm>
+            <a:off x="566928" y="3401568"/>
+            <a:ext cx="5193792" cy="2651760"/>
+          </a:xfrm>
+          <a:prstGeom prst="roundRect">
+            <a:avLst/>
+          </a:prstGeom>
+          <a:solidFill>
+            <a:srgbClr val="FFFFFF"/>
+          </a:solidFill>
+          <a:ln w="12700">
+            <a:solidFill>
+              <a:srgbClr val="E2E8F0"/>
+            </a:solidFill>
+          </a:ln>
+        </p:spPr>
+        <p:style>
+          <a:lnRef idx="1">
+            <a:schemeClr val="accent1"/>
+          </a:lnRef>
+          <a:fillRef idx="3">
+            <a:schemeClr val="accent1"/>
+          </a:fillRef>
+          <a:effectRef idx="2">
+            <a:schemeClr val="accent1"/>
+          </a:effectRef>
+          <a:fontRef idx="minor">
+            <a:schemeClr val="lt1"/>
+          </a:fontRef>
+        </p:style>
+        <p:txBody>
+          <a:bodyPr rtlCol="0" anchor="ctr"/>
+          <a:lstStyle/>
+          <a:p>
+            <a:pPr algn="ctr"/>
+          </a:p>
+        </p:txBody>
+      </p:sp>
+      <p:sp>
+        <p:nvSpPr>
+          <p:cNvPr id="11" name="TextBox 10"/>
+          <p:cNvSpPr txBox="1"/>
+          <p:nvPr/>
+        </p:nvSpPr>
+        <p:spPr>
+          <a:xfrm>
+            <a:off x="932688" y="3767328"/>
+            <a:ext cx="4434840" cy="292608"/>
+          </a:xfrm>
+          <a:prstGeom prst="rect">
+            <a:avLst/>
+          </a:prstGeom>
+          <a:noFill/>
+        </p:spPr>
+        <p:txBody>
+          <a:bodyPr wrap="square" lIns="18288" rIns="18288" tIns="18288" bIns="18288" anchor="t">
+            <a:spAutoFit/>
+          </a:bodyPr>
+          <a:lstStyle/>
+          <a:p>
+            <a:pPr algn="l">
+              <a:defRPr sz="1400" b="1">
+                <a:solidFill>
+                  <a:srgbClr val="111827"/>
+                </a:solidFill>
+                <a:latin typeface="Aptos"/>
+              </a:defRPr>
+            </a:pPr>
+            <a:r>
+              <a:t>Work Time</a:t>
+            </a:r>
+          </a:p>
+        </p:txBody>
+      </p:sp>
+      <p:sp>
+        <p:nvSpPr>
+          <p:cNvPr id="12" name="Oval 11"/>
+          <p:cNvSpPr/>
+          <p:nvPr/>
+        </p:nvSpPr>
+        <p:spPr>
+          <a:xfrm>
+            <a:off x="932688" y="4325112"/>
+            <a:ext cx="118872" cy="118872"/>
+          </a:xfrm>
+          <a:prstGeom prst="ellipse">
+            <a:avLst/>
+          </a:prstGeom>
+          <a:solidFill>
+            <a:srgbClr val="14B8A6"/>
+          </a:solidFill>
+          <a:ln>
+            <a:noFill/>
+          </a:ln>
+        </p:spPr>
+        <p:style>
+          <a:lnRef idx="1">
+            <a:schemeClr val="accent1"/>
+          </a:lnRef>
+          <a:fillRef idx="3">
+            <a:schemeClr val="accent1"/>
+          </a:fillRef>
+          <a:effectRef idx="2">
+            <a:schemeClr val="accent1"/>
+          </a:effectRef>
+          <a:fontRef idx="minor">
+            <a:schemeClr val="lt1"/>
+          </a:fontRef>
+        </p:style>
+        <p:txBody>
+          <a:bodyPr rtlCol="0" anchor="ctr"/>
+          <a:lstStyle/>
+          <a:p>
+            <a:pPr algn="ctr"/>
+          </a:p>
+        </p:txBody>
+      </p:sp>
+      <p:sp>
+        <p:nvSpPr>
+          <p:cNvPr id="13" name="TextBox 12"/>
+          <p:cNvSpPr txBox="1"/>
+          <p:nvPr/>
+        </p:nvSpPr>
+        <p:spPr>
+          <a:xfrm>
+            <a:off x="1188720" y="4270248"/>
+            <a:ext cx="4160520" cy="384048"/>
+          </a:xfrm>
+          <a:prstGeom prst="rect">
+            <a:avLst/>
+          </a:prstGeom>
+          <a:noFill/>
+        </p:spPr>
+        <p:txBody>
+          <a:bodyPr wrap="square" lIns="18288" rIns="18288" tIns="18288" bIns="18288" anchor="t">
+            <a:spAutoFit/>
+          </a:bodyPr>
+          <a:lstStyle/>
+          <a:p>
+            <a:pPr algn="l">
+              <a:defRPr sz="1150" b="0">
+                <a:solidFill>
+                  <a:srgbClr val="525E71"/>
+                </a:solidFill>
+                <a:latin typeface="Aptos"/>
+              </a:defRPr>
+            </a:pPr>
+            <a:r>
+              <a:t>B) A cause-and-effect relationship</a:t>
+            </a:r>
+          </a:p>
+        </p:txBody>
+      </p:sp>
+      <p:sp>
+        <p:nvSpPr>
+          <p:cNvPr id="14" name="Oval 13"/>
+          <p:cNvSpPr/>
+          <p:nvPr/>
+        </p:nvSpPr>
+        <p:spPr>
+          <a:xfrm>
+            <a:off x="932688" y="4782312"/>
+            <a:ext cx="118872" cy="118872"/>
+          </a:xfrm>
+          <a:prstGeom prst="ellipse">
+            <a:avLst/>
+          </a:prstGeom>
+          <a:solidFill>
+            <a:srgbClr val="14B8A6"/>
+          </a:solidFill>
+          <a:ln>
+            <a:noFill/>
+          </a:ln>
+        </p:spPr>
+        <p:style>
+          <a:lnRef idx="1">
+            <a:schemeClr val="accent1"/>
+          </a:lnRef>
+          <a:fillRef idx="3">
+            <a:schemeClr val="accent1"/>
+          </a:fillRef>
+          <a:effectRef idx="2">
+            <a:schemeClr val="accent1"/>
+          </a:effectRef>
+          <a:fontRef idx="minor">
+            <a:schemeClr val="lt1"/>
+          </a:fontRef>
+        </p:style>
+        <p:txBody>
+          <a:bodyPr rtlCol="0" anchor="ctr"/>
+          <a:lstStyle/>
+          <a:p>
+            <a:pPr algn="ctr"/>
+          </a:p>
+        </p:txBody>
+      </p:sp>
+      <p:sp>
+        <p:nvSpPr>
+          <p:cNvPr id="15" name="TextBox 14"/>
+          <p:cNvSpPr txBox="1"/>
+          <p:nvPr/>
+        </p:nvSpPr>
+        <p:spPr>
+          <a:xfrm>
+            <a:off x="1188720" y="4727448"/>
+            <a:ext cx="4160520" cy="384048"/>
+          </a:xfrm>
+          <a:prstGeom prst="rect">
+            <a:avLst/>
+          </a:prstGeom>
+          <a:noFill/>
+        </p:spPr>
+        <p:txBody>
+          <a:bodyPr wrap="square" lIns="18288" rIns="18288" tIns="18288" bIns="18288" anchor="t">
+            <a:spAutoFit/>
+          </a:bodyPr>
+          <a:lstStyle/>
+          <a:p>
+            <a:pPr algn="l">
+              <a:defRPr sz="1150" b="0">
+                <a:solidFill>
+                  <a:srgbClr val="525E71"/>
+                </a:solidFill>
+                <a:latin typeface="Aptos"/>
+              </a:defRPr>
+            </a:pPr>
+            <a:r>
+              <a:t>C) An unrelated example</a:t>
+            </a:r>
+          </a:p>
+        </p:txBody>
+      </p:sp>
+      <p:sp>
+        <p:nvSpPr>
+          <p:cNvPr id="16" name="Oval 15"/>
+          <p:cNvSpPr/>
+          <p:nvPr/>
+        </p:nvSpPr>
+        <p:spPr>
+          <a:xfrm>
+            <a:off x="932688" y="5239512"/>
+            <a:ext cx="118872" cy="118872"/>
+          </a:xfrm>
+          <a:prstGeom prst="ellipse">
+            <a:avLst/>
+          </a:prstGeom>
+          <a:solidFill>
+            <a:srgbClr val="14B8A6"/>
+          </a:solidFill>
+          <a:ln>
+            <a:noFill/>
+          </a:ln>
+        </p:spPr>
+        <p:style>
+          <a:lnRef idx="1">
+            <a:schemeClr val="accent1"/>
+          </a:lnRef>
+          <a:fillRef idx="3">
+            <a:schemeClr val="accent1"/>
+          </a:fillRef>
+          <a:effectRef idx="2">
+            <a:schemeClr val="accent1"/>
+          </a:effectRef>
+          <a:fontRef idx="minor">
+            <a:schemeClr val="lt1"/>
+          </a:fontRef>
+        </p:style>
+        <p:txBody>
+          <a:bodyPr rtlCol="0" anchor="ctr"/>
+          <a:lstStyle/>
+          <a:p>
+            <a:pPr algn="ctr"/>
+          </a:p>
+        </p:txBody>
+      </p:sp>
+      <p:sp>
+        <p:nvSpPr>
+          <p:cNvPr id="17" name="TextBox 16"/>
+          <p:cNvSpPr txBox="1"/>
+          <p:nvPr/>
+        </p:nvSpPr>
+        <p:spPr>
+          <a:xfrm>
+            <a:off x="1188720" y="5184648"/>
+            <a:ext cx="4160520" cy="384048"/>
+          </a:xfrm>
+          <a:prstGeom prst="rect">
+            <a:avLst/>
+          </a:prstGeom>
+          <a:noFill/>
+        </p:spPr>
+        <p:txBody>
+          <a:bodyPr wrap="square" lIns="18288" rIns="18288" tIns="18288" bIns="18288" anchor="t">
+            <a:spAutoFit/>
+          </a:bodyPr>
+          <a:lstStyle/>
+          <a:p>
+            <a:pPr algn="l">
+              <a:defRPr sz="1150" b="0">
+                <a:solidFill>
+                  <a:srgbClr val="525E71"/>
+                </a:solidFill>
+                <a:latin typeface="Aptos"/>
+              </a:defRPr>
+            </a:pPr>
+            <a:r>
+              <a:t>D) A memorized definition</a:t>
+            </a:r>
+          </a:p>
+        </p:txBody>
+      </p:sp>
+      <p:sp>
+        <p:nvSpPr>
+          <p:cNvPr id="18" name="Rounded Rectangle 17"/>
+          <p:cNvSpPr/>
+          <p:nvPr/>
+        </p:nvSpPr>
+        <p:spPr>
+          <a:xfrm>
+            <a:off x="6071616" y="3401568"/>
+            <a:ext cx="5468112" cy="2651760"/>
+          </a:xfrm>
+          <a:prstGeom prst="roundRect">
+            <a:avLst/>
+          </a:prstGeom>
+          <a:solidFill>
+            <a:srgbClr val="E2E8F0"/>
+          </a:solidFill>
+          <a:ln>
+            <a:noFill/>
+          </a:ln>
+        </p:spPr>
+        <p:style>
+          <a:lnRef idx="1">
+            <a:schemeClr val="accent1"/>
+          </a:lnRef>
+          <a:fillRef idx="3">
+            <a:schemeClr val="accent1"/>
+          </a:fillRef>
+          <a:effectRef idx="2">
+            <a:schemeClr val="accent1"/>
+          </a:effectRef>
+          <a:fontRef idx="minor">
+            <a:schemeClr val="lt1"/>
+          </a:fontRef>
+        </p:style>
+        <p:txBody>
+          <a:bodyPr rtlCol="0" anchor="ctr"/>
+          <a:lstStyle/>
+          <a:p>
+            <a:pPr algn="ctr"/>
+          </a:p>
+        </p:txBody>
+      </p:sp>
+      <p:sp>
+        <p:nvSpPr>
+          <p:cNvPr id="19" name="TextBox 18"/>
+          <p:cNvSpPr txBox="1"/>
+          <p:nvPr/>
+        </p:nvSpPr>
+        <p:spPr>
+          <a:xfrm>
+            <a:off x="6437376" y="3767328"/>
+            <a:ext cx="4663440" cy="292608"/>
+          </a:xfrm>
+          <a:prstGeom prst="rect">
+            <a:avLst/>
+          </a:prstGeom>
+          <a:noFill/>
+        </p:spPr>
+        <p:txBody>
+          <a:bodyPr wrap="square" lIns="18288" rIns="18288" tIns="18288" bIns="18288" anchor="t">
+            <a:spAutoFit/>
+          </a:bodyPr>
+          <a:lstStyle/>
+          <a:p>
+            <a:pPr algn="l">
+              <a:defRPr sz="1400" b="1">
+                <a:solidFill>
+                  <a:srgbClr val="111827"/>
+                </a:solidFill>
+                <a:latin typeface="Aptos"/>
+              </a:defRPr>
+            </a:pPr>
+            <a:r>
+              <a:t>Teacher Key</a:t>
+            </a:r>
+          </a:p>
+        </p:txBody>
+      </p:sp>
+      <p:sp>
+        <p:nvSpPr>
+          <p:cNvPr id="20" name="Oval 19"/>
+          <p:cNvSpPr/>
+          <p:nvPr/>
+        </p:nvSpPr>
+        <p:spPr>
+          <a:xfrm>
+            <a:off x="6437376" y="4325112"/>
+            <a:ext cx="118872" cy="118872"/>
+          </a:xfrm>
+          <a:prstGeom prst="ellipse">
+            <a:avLst/>
+          </a:prstGeom>
+          <a:solidFill>
+            <a:srgbClr val="14B8A6"/>
+          </a:solidFill>
+          <a:ln>
+            <a:noFill/>
+          </a:ln>
+        </p:spPr>
+        <p:style>
+          <a:lnRef idx="1">
+            <a:schemeClr val="accent1"/>
+          </a:lnRef>
+          <a:fillRef idx="3">
+            <a:schemeClr val="accent1"/>
+          </a:fillRef>
+          <a:effectRef idx="2">
+            <a:schemeClr val="accent1"/>
+          </a:effectRef>
+          <a:fontRef idx="minor">
+            <a:schemeClr val="lt1"/>
+          </a:fontRef>
+        </p:style>
+        <p:txBody>
+          <a:bodyPr rtlCol="0" anchor="ctr"/>
+          <a:lstStyle/>
+          <a:p>
+            <a:pPr algn="ctr"/>
+          </a:p>
+        </p:txBody>
+      </p:sp>
+      <p:sp>
+        <p:nvSpPr>
+          <p:cNvPr id="21" name="TextBox 20"/>
+          <p:cNvSpPr txBox="1"/>
+          <p:nvPr/>
+        </p:nvSpPr>
+        <p:spPr>
+          <a:xfrm>
+            <a:off x="6693408" y="4270248"/>
+            <a:ext cx="4389120" cy="384048"/>
+          </a:xfrm>
+          <a:prstGeom prst="rect">
+            <a:avLst/>
+          </a:prstGeom>
+          <a:noFill/>
+        </p:spPr>
+        <p:txBody>
+          <a:bodyPr wrap="square" lIns="18288" rIns="18288" tIns="18288" bIns="18288" anchor="t">
+            <a:spAutoFit/>
+          </a:bodyPr>
+          <a:lstStyle/>
+          <a:p>
+            <a:pPr algn="l">
+              <a:defRPr sz="1150" b="0">
+                <a:solidFill>
+                  <a:srgbClr val="525E71"/>
+                </a:solidFill>
+                <a:latin typeface="Aptos"/>
+              </a:defRPr>
+            </a:pPr>
+            <a:r>
+              <a:t>Answer: B</a:t>
+            </a:r>
+          </a:p>
+        </p:txBody>
+      </p:sp>
+      <p:sp>
+        <p:nvSpPr>
+          <p:cNvPr id="22" name="Oval 21"/>
+          <p:cNvSpPr/>
+          <p:nvPr/>
+        </p:nvSpPr>
+        <p:spPr>
+          <a:xfrm>
+            <a:off x="6437376" y="4782312"/>
+            <a:ext cx="118872" cy="118872"/>
+          </a:xfrm>
+          <a:prstGeom prst="ellipse">
+            <a:avLst/>
+          </a:prstGeom>
+          <a:solidFill>
+            <a:srgbClr val="14B8A6"/>
+          </a:solidFill>
+          <a:ln>
+            <a:noFill/>
+          </a:ln>
+        </p:spPr>
+        <p:style>
+          <a:lnRef idx="1">
+            <a:schemeClr val="accent1"/>
+          </a:lnRef>
+          <a:fillRef idx="3">
+            <a:schemeClr val="accent1"/>
+          </a:fillRef>
+          <a:effectRef idx="2">
+            <a:schemeClr val="accent1"/>
+          </a:effectRef>
+          <a:fontRef idx="minor">
+            <a:schemeClr val="lt1"/>
+          </a:fontRef>
+        </p:style>
+        <p:txBody>
+          <a:bodyPr rtlCol="0" anchor="ctr"/>
+          <a:lstStyle/>
+          <a:p>
+            <a:pPr algn="ctr"/>
+          </a:p>
+        </p:txBody>
+      </p:sp>
+      <p:sp>
+        <p:nvSpPr>
+          <p:cNvPr id="23" name="TextBox 22"/>
+          <p:cNvSpPr txBox="1"/>
+          <p:nvPr/>
+        </p:nvSpPr>
+        <p:spPr>
+          <a:xfrm>
+            <a:off x="6693408" y="4727448"/>
+            <a:ext cx="4389120" cy="384048"/>
+          </a:xfrm>
+          <a:prstGeom prst="rect">
+            <a:avLst/>
+          </a:prstGeom>
+          <a:noFill/>
+        </p:spPr>
+        <p:txBody>
+          <a:bodyPr wrap="square" lIns="18288" rIns="18288" tIns="18288" bIns="18288" anchor="t">
+            <a:spAutoFit/>
+          </a:bodyPr>
+          <a:lstStyle/>
+          <a:p>
+            <a:pPr algn="l">
+              <a:defRPr sz="1150" b="0">
+                <a:solidFill>
+                  <a:srgbClr val="525E71"/>
+                </a:solidFill>
+                <a:latin typeface="Aptos"/>
+              </a:defRPr>
+            </a:pPr>
+            <a:r>
+              <a:t>Explanation: Students should identify the relationship, not just recall words.</a:t>
+            </a:r>
+          </a:p>
+        </p:txBody>
+      </p:sp>
+    </p:spTree>
+  </p:cSld>
+  <p:clrMapOvr>
+    <a:masterClrMapping/>
+  </p:clrMapOvr>
+</p:sld>
+</file>
+
+<file path=ppt/slides/slide5.xml><?xml version="1.0" encoding="utf-8"?>
+<p:sld xmlns:a="http://schemas.openxmlformats.org/drawingml/2006/main" xmlns:p="http://schemas.openxmlformats.org/presentationml/2006/main" xmlns:r="http://schemas.openxmlformats.org/officeDocument/2006/relationships">
+  <p:cSld>
+    <p:bg>
+      <p:bgPr>
+        <a:solidFill>
+          <a:srgbClr val="F8FAFC"/>
+        </a:solidFill>
+        <a:effectLst/>
+      </p:bgPr>
+    </p:bg>
+    <p:spTree>
+      <p:nvGrpSpPr>
+        <p:cNvPr id="1" name=""/>
+        <p:cNvGrpSpPr/>
+        <p:nvPr/>
+      </p:nvGrpSpPr>
+      <p:grpSpPr/>
+      <p:sp>
+        <p:nvSpPr>
+          <p:cNvPr id="2" name="Rounded Rectangle 1"/>
+          <p:cNvSpPr/>
+          <p:nvPr/>
+        </p:nvSpPr>
+        <p:spPr>
+          <a:xfrm>
+            <a:off x="566928" y="347472"/>
+            <a:ext cx="1005840" cy="310896"/>
+          </a:xfrm>
+          <a:prstGeom prst="roundRect">
+            <a:avLst/>
+          </a:prstGeom>
+          <a:solidFill>
+            <a:srgbClr val="14B8A6"/>
+          </a:solidFill>
+          <a:ln>
+            <a:noFill/>
+          </a:ln>
+        </p:spPr>
+        <p:style>
+          <a:lnRef idx="1">
+            <a:schemeClr val="accent1"/>
+          </a:lnRef>
+          <a:fillRef idx="3">
+            <a:schemeClr val="accent1"/>
+          </a:fillRef>
+          <a:effectRef idx="2">
+            <a:schemeClr val="accent1"/>
+          </a:effectRef>
+          <a:fontRef idx="minor">
+            <a:schemeClr val="lt1"/>
+          </a:fontRef>
+        </p:style>
+        <p:txBody>
+          <a:bodyPr rtlCol="0" anchor="ctr"/>
+          <a:lstStyle/>
+          <a:p>
+            <a:pPr algn="ctr"/>
+          </a:p>
+        </p:txBody>
+      </p:sp>
+      <p:sp>
+        <p:nvSpPr>
+          <p:cNvPr id="3" name="TextBox 2"/>
+          <p:cNvSpPr txBox="1"/>
+          <p:nvPr/>
+        </p:nvSpPr>
+        <p:spPr>
+          <a:xfrm>
+            <a:off x="658368" y="397764"/>
+            <a:ext cx="822960" cy="164592"/>
+          </a:xfrm>
+          <a:prstGeom prst="rect">
+            <a:avLst/>
+          </a:prstGeom>
+          <a:noFill/>
+        </p:spPr>
+        <p:txBody>
+          <a:bodyPr wrap="square" lIns="18288" rIns="18288" tIns="18288" bIns="18288" anchor="t">
+            <a:spAutoFit/>
+          </a:bodyPr>
+          <a:lstStyle/>
+          <a:p>
+            <a:pPr algn="ctr">
+              <a:defRPr sz="800" b="1">
+                <a:solidFill>
+                  <a:srgbClr val="FFFFFF"/>
+                </a:solidFill>
+                <a:latin typeface="Aptos"/>
+              </a:defRPr>
+            </a:pPr>
+            <a:r>
+              <a:t>SUMMARY</a:t>
+            </a:r>
+          </a:p>
+        </p:txBody>
+      </p:sp>
+      <p:sp>
+        <p:nvSpPr>
+          <p:cNvPr id="4" name="TextBox 3"/>
+          <p:cNvSpPr txBox="1"/>
+          <p:nvPr/>
+        </p:nvSpPr>
+        <p:spPr>
+          <a:xfrm>
+            <a:off x="10881360" y="347472"/>
+            <a:ext cx="502920" cy="228600"/>
+          </a:xfrm>
+          <a:prstGeom prst="rect">
+            <a:avLst/>
+          </a:prstGeom>
+          <a:noFill/>
+        </p:spPr>
+        <p:txBody>
+          <a:bodyPr wrap="square" lIns="18288" rIns="18288" tIns="18288" bIns="18288" anchor="t">
+            <a:spAutoFit/>
+          </a:bodyPr>
+          <a:lstStyle/>
+          <a:p>
+            <a:pPr algn="r">
+              <a:defRPr sz="1000" b="1">
+                <a:solidFill>
+                  <a:srgbClr val="525E71"/>
+                </a:solidFill>
+                <a:latin typeface="Aptos"/>
+              </a:defRPr>
+            </a:pPr>
+            <a:r>
+              <a:t>04</a:t>
+            </a:r>
+          </a:p>
+        </p:txBody>
+      </p:sp>
+      <p:sp>
+        <p:nvSpPr>
+          <p:cNvPr id="5" name="TextBox 4"/>
+          <p:cNvSpPr txBox="1"/>
+          <p:nvPr/>
+        </p:nvSpPr>
+        <p:spPr>
+          <a:xfrm>
+            <a:off x="566928" y="786384"/>
+            <a:ext cx="8092440" cy="749808"/>
+          </a:xfrm>
+          <a:prstGeom prst="rect">
+            <a:avLst/>
+          </a:prstGeom>
+          <a:noFill/>
+        </p:spPr>
+        <p:txBody>
+          <a:bodyPr wrap="square" lIns="18288" rIns="18288" tIns="18288" bIns="18288" anchor="t">
+            <a:spAutoFit/>
+          </a:bodyPr>
+          <a:lstStyle/>
+          <a:p>
+            <a:pPr algn="l">
+              <a:defRPr sz="3200" b="1">
+                <a:solidFill>
+                  <a:srgbClr val="111827"/>
+                </a:solidFill>
+                <a:latin typeface="Aptos"/>
+              </a:defRPr>
+            </a:pPr>
+            <a:r>
+              <a:t>Close With Transfer</a:t>
+            </a:r>
+          </a:p>
+        </p:txBody>
+      </p:sp>
+      <p:sp>
+        <p:nvSpPr>
+          <p:cNvPr id="6" name="Rounded Rectangle 5"/>
+          <p:cNvSpPr/>
+          <p:nvPr/>
+        </p:nvSpPr>
+        <p:spPr>
+          <a:xfrm>
+            <a:off x="9006840" y="768096"/>
+            <a:ext cx="1508760" cy="310896"/>
+          </a:xfrm>
+          <a:prstGeom prst="roundRect">
+            <a:avLst/>
+          </a:prstGeom>
+          <a:solidFill>
+            <a:srgbClr val="F43F5E"/>
+          </a:solidFill>
+          <a:ln>
+            <a:noFill/>
+          </a:ln>
+        </p:spPr>
+        <p:style>
+          <a:lnRef idx="1">
+            <a:schemeClr val="accent1"/>
+          </a:lnRef>
+          <a:fillRef idx="3">
+            <a:schemeClr val="accent1"/>
+          </a:fillRef>
+          <a:effectRef idx="2">
+            <a:schemeClr val="accent1"/>
+          </a:effectRef>
+          <a:fontRef idx="minor">
+            <a:schemeClr val="lt1"/>
+          </a:fontRef>
+        </p:style>
+        <p:txBody>
+          <a:bodyPr rtlCol="0" anchor="ctr"/>
+          <a:lstStyle/>
+          <a:p>
+            <a:pPr algn="ctr"/>
+          </a:p>
+        </p:txBody>
+      </p:sp>
+      <p:sp>
+        <p:nvSpPr>
+          <p:cNvPr id="7" name="TextBox 6"/>
+          <p:cNvSpPr txBox="1"/>
+          <p:nvPr/>
+        </p:nvSpPr>
+        <p:spPr>
+          <a:xfrm>
+            <a:off x="9098280" y="818388"/>
+            <a:ext cx="1325880" cy="164592"/>
+          </a:xfrm>
+          <a:prstGeom prst="rect">
+            <a:avLst/>
+          </a:prstGeom>
+          <a:noFill/>
+        </p:spPr>
+        <p:txBody>
+          <a:bodyPr wrap="square" lIns="18288" rIns="18288" tIns="18288" bIns="18288" anchor="t">
+            <a:spAutoFit/>
+          </a:bodyPr>
+          <a:lstStyle/>
+          <a:p>
+            <a:pPr algn="ctr">
+              <a:defRPr sz="800" b="1">
+                <a:solidFill>
+                  <a:srgbClr val="FFFFFF"/>
+                </a:solidFill>
+                <a:latin typeface="Aptos"/>
+              </a:defRPr>
+            </a:pPr>
+            <a:r>
+              <a:t>CREATE</a:t>
+            </a:r>
+          </a:p>
+        </p:txBody>
+      </p:sp>
+      <p:sp>
+        <p:nvSpPr>
+          <p:cNvPr id="8" name="Rounded Rectangle 7"/>
+          <p:cNvSpPr/>
+          <p:nvPr/>
+        </p:nvSpPr>
+        <p:spPr>
+          <a:xfrm>
+            <a:off x="566928" y="1847088"/>
+            <a:ext cx="3364992" cy="4069080"/>
+          </a:xfrm>
+          <a:prstGeom prst="roundRect">
+            <a:avLst/>
+          </a:prstGeom>
+          <a:solidFill>
+            <a:srgbClr val="FFFFFF"/>
+          </a:solidFill>
+          <a:ln w="12700">
+            <a:solidFill>
+              <a:srgbClr val="E2E8F0"/>
+            </a:solidFill>
+          </a:ln>
+        </p:spPr>
+        <p:style>
+          <a:lnRef idx="1">
+            <a:schemeClr val="accent1"/>
+          </a:lnRef>
+          <a:fillRef idx="3">
+            <a:schemeClr val="accent1"/>
+          </a:fillRef>
+          <a:effectRef idx="2">
+            <a:schemeClr val="accent1"/>
+          </a:effectRef>
+          <a:fontRef idx="minor">
+            <a:schemeClr val="lt1"/>
+          </a:fontRef>
+        </p:style>
+        <p:txBody>
+          <a:bodyPr rtlCol="0" anchor="ctr"/>
+          <a:lstStyle/>
+          <a:p>
+            <a:pPr algn="ctr"/>
+          </a:p>
+        </p:txBody>
+      </p:sp>
+      <p:sp>
+        <p:nvSpPr>
+          <p:cNvPr id="9" name="Rounded Rectangle 8"/>
+          <p:cNvSpPr/>
+          <p:nvPr/>
+        </p:nvSpPr>
+        <p:spPr>
+          <a:xfrm>
+            <a:off x="877824" y="2157984"/>
+            <a:ext cx="1280160" cy="310896"/>
+          </a:xfrm>
+          <a:prstGeom prst="roundRect">
+            <a:avLst/>
+          </a:prstGeom>
+          <a:solidFill>
+            <a:srgbClr val="14B8A6"/>
+          </a:solidFill>
+          <a:ln>
+            <a:noFill/>
+          </a:ln>
+        </p:spPr>
+        <p:style>
+          <a:lnRef idx="1">
+            <a:schemeClr val="accent1"/>
+          </a:lnRef>
+          <a:fillRef idx="3">
+            <a:schemeClr val="accent1"/>
+          </a:fillRef>
+          <a:effectRef idx="2">
+            <a:schemeClr val="accent1"/>
+          </a:effectRef>
+          <a:fontRef idx="minor">
+            <a:schemeClr val="lt1"/>
+          </a:fontRef>
+        </p:style>
+        <p:txBody>
+          <a:bodyPr rtlCol="0" anchor="ctr"/>
+          <a:lstStyle/>
+          <a:p>
+            <a:pPr algn="ctr"/>
+          </a:p>
+        </p:txBody>
+      </p:sp>
+      <p:sp>
+        <p:nvSpPr>
+          <p:cNvPr id="10" name="TextBox 9"/>
+          <p:cNvSpPr txBox="1"/>
+          <p:nvPr/>
+        </p:nvSpPr>
+        <p:spPr>
+          <a:xfrm>
+            <a:off x="969264" y="2208276"/>
+            <a:ext cx="1097280" cy="164592"/>
+          </a:xfrm>
+          <a:prstGeom prst="rect">
+            <a:avLst/>
+          </a:prstGeom>
+          <a:noFill/>
+        </p:spPr>
+        <p:txBody>
+          <a:bodyPr wrap="square" lIns="18288" rIns="18288" tIns="18288" bIns="18288" anchor="t">
+            <a:spAutoFit/>
+          </a:bodyPr>
+          <a:lstStyle/>
+          <a:p>
+            <a:pPr algn="ctr">
+              <a:defRPr sz="800" b="1">
+                <a:solidFill>
+                  <a:srgbClr val="FFFFFF"/>
+                </a:solidFill>
+                <a:latin typeface="Aptos"/>
+              </a:defRPr>
+            </a:pPr>
+            <a:r>
+              <a:t>REMEMBER</a:t>
+            </a:r>
+          </a:p>
+        </p:txBody>
+      </p:sp>
+      <p:sp>
+        <p:nvSpPr>
+          <p:cNvPr id="11" name="TextBox 10"/>
+          <p:cNvSpPr txBox="1"/>
+          <p:nvPr/>
+        </p:nvSpPr>
+        <p:spPr>
+          <a:xfrm>
+            <a:off x="877824" y="2596896"/>
+            <a:ext cx="2743200" cy="292608"/>
+          </a:xfrm>
+          <a:prstGeom prst="rect">
+            <a:avLst/>
+          </a:prstGeom>
+          <a:noFill/>
+        </p:spPr>
+        <p:txBody>
+          <a:bodyPr wrap="square" lIns="18288" rIns="18288" tIns="18288" bIns="18288" anchor="t">
+            <a:spAutoFit/>
+          </a:bodyPr>
+          <a:lstStyle/>
+          <a:p>
+            <a:pPr algn="l">
+              <a:defRPr sz="1400" b="1">
+                <a:solidFill>
+                  <a:srgbClr val="111827"/>
+                </a:solidFill>
+                <a:latin typeface="Aptos"/>
+              </a:defRPr>
+            </a:pPr>
+          </a:p>
+        </p:txBody>
+      </p:sp>
+      <p:sp>
+        <p:nvSpPr>
+          <p:cNvPr id="12" name="Oval 11"/>
+          <p:cNvSpPr/>
+          <p:nvPr/>
+        </p:nvSpPr>
+        <p:spPr>
+          <a:xfrm>
+            <a:off x="877824" y="3154680"/>
+            <a:ext cx="118872" cy="118872"/>
+          </a:xfrm>
+          <a:prstGeom prst="ellipse">
+            <a:avLst/>
+          </a:prstGeom>
+          <a:solidFill>
+            <a:srgbClr val="14B8A6"/>
+          </a:solidFill>
+          <a:ln>
+            <a:noFill/>
+          </a:ln>
+        </p:spPr>
+        <p:style>
+          <a:lnRef idx="1">
+            <a:schemeClr val="accent1"/>
+          </a:lnRef>
+          <a:fillRef idx="3">
+            <a:schemeClr val="accent1"/>
+          </a:fillRef>
+          <a:effectRef idx="2">
+            <a:schemeClr val="accent1"/>
+          </a:effectRef>
+          <a:fontRef idx="minor">
+            <a:schemeClr val="lt1"/>
+          </a:fontRef>
+        </p:style>
+        <p:txBody>
+          <a:bodyPr rtlCol="0" anchor="ctr"/>
+          <a:lstStyle/>
+          <a:p>
+            <a:pPr algn="ctr"/>
+          </a:p>
+        </p:txBody>
+      </p:sp>
+      <p:sp>
+        <p:nvSpPr>
+          <p:cNvPr id="13" name="TextBox 12"/>
+          <p:cNvSpPr txBox="1"/>
+          <p:nvPr/>
+        </p:nvSpPr>
+        <p:spPr>
+          <a:xfrm>
+            <a:off x="1133856" y="3099816"/>
+            <a:ext cx="2468880" cy="384048"/>
+          </a:xfrm>
+          <a:prstGeom prst="rect">
+            <a:avLst/>
+          </a:prstGeom>
+          <a:noFill/>
+        </p:spPr>
+        <p:txBody>
+          <a:bodyPr wrap="square" lIns="18288" rIns="18288" tIns="18288" bIns="18288" anchor="t">
+            <a:spAutoFit/>
+          </a:bodyPr>
+          <a:lstStyle/>
+          <a:p>
+            <a:pPr algn="l">
+              <a:defRPr sz="1150" b="0">
+                <a:solidFill>
+                  <a:srgbClr val="525E71"/>
+                </a:solidFill>
+                <a:latin typeface="Aptos"/>
+              </a:defRPr>
+            </a:pPr>
+            <a:r>
+              <a:t>Students can define the key idea</a:t>
+            </a:r>
+          </a:p>
+        </p:txBody>
+      </p:sp>
+      <p:sp>
+        <p:nvSpPr>
+          <p:cNvPr id="14" name="Oval 13"/>
+          <p:cNvSpPr/>
+          <p:nvPr/>
+        </p:nvSpPr>
+        <p:spPr>
+          <a:xfrm>
+            <a:off x="877824" y="3611880"/>
+            <a:ext cx="118872" cy="118872"/>
+          </a:xfrm>
+          <a:prstGeom prst="ellipse">
+            <a:avLst/>
+          </a:prstGeom>
+          <a:solidFill>
+            <a:srgbClr val="14B8A6"/>
+          </a:solidFill>
+          <a:ln>
+            <a:noFill/>
+          </a:ln>
+        </p:spPr>
+        <p:style>
+          <a:lnRef idx="1">
+            <a:schemeClr val="accent1"/>
+          </a:lnRef>
+          <a:fillRef idx="3">
+            <a:schemeClr val="accent1"/>
+          </a:fillRef>
+          <a:effectRef idx="2">
+            <a:schemeClr val="accent1"/>
+          </a:effectRef>
+          <a:fontRef idx="minor">
+            <a:schemeClr val="lt1"/>
+          </a:fontRef>
+        </p:style>
+        <p:txBody>
+          <a:bodyPr rtlCol="0" anchor="ctr"/>
+          <a:lstStyle/>
+          <a:p>
+            <a:pPr algn="ctr"/>
+          </a:p>
+        </p:txBody>
+      </p:sp>
+      <p:sp>
+        <p:nvSpPr>
+          <p:cNvPr id="15" name="TextBox 14"/>
+          <p:cNvSpPr txBox="1"/>
+          <p:nvPr/>
+        </p:nvSpPr>
+        <p:spPr>
+          <a:xfrm>
+            <a:off x="1133856" y="3557016"/>
+            <a:ext cx="2468880" cy="384048"/>
+          </a:xfrm>
+          <a:prstGeom prst="rect">
+            <a:avLst/>
+          </a:prstGeom>
+          <a:noFill/>
+        </p:spPr>
+        <p:txBody>
+          <a:bodyPr wrap="square" lIns="18288" rIns="18288" tIns="18288" bIns="18288" anchor="t">
+            <a:spAutoFit/>
+          </a:bodyPr>
+          <a:lstStyle/>
+          <a:p>
+            <a:pPr algn="l">
+              <a:defRPr sz="1150" b="0">
+                <a:solidFill>
+                  <a:srgbClr val="525E71"/>
+                </a:solidFill>
+                <a:latin typeface="Aptos"/>
+              </a:defRPr>
+            </a:pPr>
+            <a:r>
+              <a:t>Students can apply it to a new scenario</a:t>
+            </a:r>
+          </a:p>
+        </p:txBody>
+      </p:sp>
+      <p:sp>
+        <p:nvSpPr>
+          <p:cNvPr id="16" name="Rounded Rectangle 15"/>
+          <p:cNvSpPr/>
+          <p:nvPr/>
+        </p:nvSpPr>
+        <p:spPr>
+          <a:xfrm>
+            <a:off x="4343400" y="1847088"/>
+            <a:ext cx="3364992" cy="4069080"/>
+          </a:xfrm>
+          <a:prstGeom prst="roundRect">
+            <a:avLst/>
+          </a:prstGeom>
+          <a:solidFill>
+            <a:srgbClr val="FFFFFF"/>
+          </a:solidFill>
+          <a:ln w="12700">
+            <a:solidFill>
+              <a:srgbClr val="E2E8F0"/>
+            </a:solidFill>
+          </a:ln>
+        </p:spPr>
+        <p:style>
+          <a:lnRef idx="1">
+            <a:schemeClr val="accent1"/>
+          </a:lnRef>
+          <a:fillRef idx="3">
+            <a:schemeClr val="accent1"/>
+          </a:fillRef>
+          <a:effectRef idx="2">
+            <a:schemeClr val="accent1"/>
+          </a:effectRef>
+          <a:fontRef idx="minor">
+            <a:schemeClr val="lt1"/>
+          </a:fontRef>
+        </p:style>
+        <p:txBody>
+          <a:bodyPr rtlCol="0" anchor="ctr"/>
+          <a:lstStyle/>
+          <a:p>
+            <a:pPr algn="ctr"/>
+          </a:p>
+        </p:txBody>
+      </p:sp>
+      <p:sp>
+        <p:nvSpPr>
+          <p:cNvPr id="17" name="Rounded Rectangle 16"/>
+          <p:cNvSpPr/>
+          <p:nvPr/>
+        </p:nvSpPr>
+        <p:spPr>
+          <a:xfrm>
+            <a:off x="4654296" y="2157984"/>
+            <a:ext cx="1280160" cy="310896"/>
+          </a:xfrm>
+          <a:prstGeom prst="roundRect">
+            <a:avLst/>
+          </a:prstGeom>
+          <a:solidFill>
+            <a:srgbClr val="F43F5E"/>
+          </a:solidFill>
+          <a:ln>
+            <a:noFill/>
+          </a:ln>
+        </p:spPr>
+        <p:style>
+          <a:lnRef idx="1">
+            <a:schemeClr val="accent1"/>
+          </a:lnRef>
+          <a:fillRef idx="3">
+            <a:schemeClr val="accent1"/>
+          </a:fillRef>
+          <a:effectRef idx="2">
+            <a:schemeClr val="accent1"/>
+          </a:effectRef>
+          <a:fontRef idx="minor">
+            <a:schemeClr val="lt1"/>
+          </a:fontRef>
+        </p:style>
+        <p:txBody>
+          <a:bodyPr rtlCol="0" anchor="ctr"/>
+          <a:lstStyle/>
+          <a:p>
+            <a:pPr algn="ctr"/>
+          </a:p>
+        </p:txBody>
+      </p:sp>
+      <p:sp>
+        <p:nvSpPr>
+          <p:cNvPr id="18" name="TextBox 17"/>
+          <p:cNvSpPr txBox="1"/>
+          <p:nvPr/>
+        </p:nvSpPr>
+        <p:spPr>
+          <a:xfrm>
+            <a:off x="4745736" y="2208276"/>
+            <a:ext cx="1097280" cy="164592"/>
+          </a:xfrm>
+          <a:prstGeom prst="rect">
+            <a:avLst/>
+          </a:prstGeom>
+          <a:noFill/>
+        </p:spPr>
+        <p:txBody>
+          <a:bodyPr wrap="square" lIns="18288" rIns="18288" tIns="18288" bIns="18288" anchor="t">
+            <a:spAutoFit/>
+          </a:bodyPr>
+          <a:lstStyle/>
+          <a:p>
+            <a:pPr algn="ctr">
+              <a:defRPr sz="800" b="1">
+                <a:solidFill>
+                  <a:srgbClr val="FFFFFF"/>
+                </a:solidFill>
+                <a:latin typeface="Aptos"/>
+              </a:defRPr>
+            </a:pPr>
+            <a:r>
+              <a:t>CONNECT</a:t>
+            </a:r>
+          </a:p>
+        </p:txBody>
+      </p:sp>
+      <p:sp>
+        <p:nvSpPr>
+          <p:cNvPr id="19" name="TextBox 18"/>
+          <p:cNvSpPr txBox="1"/>
+          <p:nvPr/>
+        </p:nvSpPr>
+        <p:spPr>
+          <a:xfrm>
+            <a:off x="4654296" y="2596896"/>
+            <a:ext cx="2743200" cy="292608"/>
+          </a:xfrm>
+          <a:prstGeom prst="rect">
+            <a:avLst/>
+          </a:prstGeom>
+          <a:noFill/>
+        </p:spPr>
+        <p:txBody>
+          <a:bodyPr wrap="square" lIns="18288" rIns="18288" tIns="18288" bIns="18288" anchor="t">
+            <a:spAutoFit/>
+          </a:bodyPr>
+          <a:lstStyle/>
+          <a:p>
+            <a:pPr algn="l">
+              <a:defRPr sz="1400" b="1">
+                <a:solidFill>
+                  <a:srgbClr val="111827"/>
+                </a:solidFill>
+                <a:latin typeface="Aptos"/>
+              </a:defRPr>
+            </a:pPr>
+          </a:p>
+        </p:txBody>
+      </p:sp>
+      <p:sp>
+        <p:nvSpPr>
+          <p:cNvPr id="20" name="Oval 19"/>
+          <p:cNvSpPr/>
+          <p:nvPr/>
+        </p:nvSpPr>
+        <p:spPr>
+          <a:xfrm>
+            <a:off x="4654296" y="3154680"/>
+            <a:ext cx="118872" cy="118872"/>
+          </a:xfrm>
+          <a:prstGeom prst="ellipse">
+            <a:avLst/>
+          </a:prstGeom>
+          <a:solidFill>
+            <a:srgbClr val="14B8A6"/>
+          </a:solidFill>
+          <a:ln>
+            <a:noFill/>
+          </a:ln>
+        </p:spPr>
+        <p:style>
+          <a:lnRef idx="1">
+            <a:schemeClr val="accent1"/>
+          </a:lnRef>
+          <a:fillRef idx="3">
+            <a:schemeClr val="accent1"/>
+          </a:fillRef>
+          <a:effectRef idx="2">
+            <a:schemeClr val="accent1"/>
+          </a:effectRef>
+          <a:fontRef idx="minor">
+            <a:schemeClr val="lt1"/>
+          </a:fontRef>
+        </p:style>
+        <p:txBody>
+          <a:bodyPr rtlCol="0" anchor="ctr"/>
+          <a:lstStyle/>
+          <a:p>
+            <a:pPr algn="ctr"/>
+          </a:p>
+        </p:txBody>
+      </p:sp>
+      <p:sp>
+        <p:nvSpPr>
+          <p:cNvPr id="21" name="TextBox 20"/>
+          <p:cNvSpPr txBox="1"/>
+          <p:nvPr/>
+        </p:nvSpPr>
+        <p:spPr>
+          <a:xfrm>
+            <a:off x="4910328" y="3099816"/>
+            <a:ext cx="2468880" cy="384048"/>
+          </a:xfrm>
+          <a:prstGeom prst="rect">
+            <a:avLst/>
+          </a:prstGeom>
+          <a:noFill/>
+        </p:spPr>
+        <p:txBody>
+          <a:bodyPr wrap="square" lIns="18288" rIns="18288" tIns="18288" bIns="18288" anchor="t">
+            <a:spAutoFit/>
+          </a:bodyPr>
+          <a:lstStyle/>
+          <a:p>
+            <a:pPr algn="l">
+              <a:defRPr sz="1150" b="0">
+                <a:solidFill>
+                  <a:srgbClr val="525E71"/>
+                </a:solidFill>
+                <a:latin typeface="Aptos"/>
+              </a:defRPr>
+            </a:pPr>
+            <a:r>
+              <a:t>Students can explain it with an example</a:t>
+            </a:r>
+          </a:p>
+        </p:txBody>
+      </p:sp>
+      <p:sp>
+        <p:nvSpPr>
+          <p:cNvPr id="22" name="Rounded Rectangle 21"/>
+          <p:cNvSpPr/>
+          <p:nvPr/>
+        </p:nvSpPr>
+        <p:spPr>
+          <a:xfrm>
+            <a:off x="8119871" y="1847088"/>
+            <a:ext cx="3364992" cy="4069080"/>
+          </a:xfrm>
+          <a:prstGeom prst="roundRect">
+            <a:avLst/>
+          </a:prstGeom>
+          <a:solidFill>
+            <a:srgbClr val="FFFFFF"/>
+          </a:solidFill>
+          <a:ln w="12700">
+            <a:solidFill>
+              <a:srgbClr val="E2E8F0"/>
+            </a:solidFill>
+          </a:ln>
+        </p:spPr>
+        <p:style>
+          <a:lnRef idx="1">
+            <a:schemeClr val="accent1"/>
+          </a:lnRef>
+          <a:fillRef idx="3">
+            <a:schemeClr val="accent1"/>
+          </a:fillRef>
+          <a:effectRef idx="2">
+            <a:schemeClr val="accent1"/>
+          </a:effectRef>
+          <a:fontRef idx="minor">
+            <a:schemeClr val="lt1"/>
+          </a:fontRef>
+        </p:style>
+        <p:txBody>
+          <a:bodyPr rtlCol="0" anchor="ctr"/>
+          <a:lstStyle/>
+          <a:p>
+            <a:pPr algn="ctr"/>
+          </a:p>
+        </p:txBody>
+      </p:sp>
+      <p:sp>
+        <p:nvSpPr>
+          <p:cNvPr id="23" name="Rounded Rectangle 22"/>
+          <p:cNvSpPr/>
+          <p:nvPr/>
+        </p:nvSpPr>
+        <p:spPr>
+          <a:xfrm>
+            <a:off x="8430767" y="2157984"/>
+            <a:ext cx="1280160" cy="310896"/>
+          </a:xfrm>
+          <a:prstGeom prst="roundRect">
+            <a:avLst/>
+          </a:prstGeom>
+          <a:solidFill>
+            <a:srgbClr val="14B8A6"/>
+          </a:solidFill>
+          <a:ln>
+            <a:noFill/>
+          </a:ln>
+        </p:spPr>
+        <p:style>
+          <a:lnRef idx="1">
+            <a:schemeClr val="accent1"/>
+          </a:lnRef>
+          <a:fillRef idx="3">
+            <a:schemeClr val="accent1"/>
+          </a:fillRef>
+          <a:effectRef idx="2">
+            <a:schemeClr val="accent1"/>
+          </a:effectRef>
+          <a:fontRef idx="minor">
+            <a:schemeClr val="lt1"/>
+          </a:fontRef>
+        </p:style>
+        <p:txBody>
+          <a:bodyPr rtlCol="0" anchor="ctr"/>
+          <a:lstStyle/>
+          <a:p>
+            <a:pPr algn="ctr"/>
+          </a:p>
+        </p:txBody>
+      </p:sp>
+      <p:sp>
+        <p:nvSpPr>
+          <p:cNvPr id="24" name="TextBox 23"/>
+          <p:cNvSpPr txBox="1"/>
+          <p:nvPr/>
+        </p:nvSpPr>
+        <p:spPr>
+          <a:xfrm>
+            <a:off x="8522207" y="2208276"/>
+            <a:ext cx="1097280" cy="164592"/>
+          </a:xfrm>
+          <a:prstGeom prst="rect">
+            <a:avLst/>
+          </a:prstGeom>
+          <a:noFill/>
+        </p:spPr>
+        <p:txBody>
+          <a:bodyPr wrap="square" lIns="18288" rIns="18288" tIns="18288" bIns="18288" anchor="t">
+            <a:spAutoFit/>
+          </a:bodyPr>
+          <a:lstStyle/>
+          <a:p>
+            <a:pPr algn="ctr">
+              <a:defRPr sz="800" b="1">
+                <a:solidFill>
+                  <a:srgbClr val="FFFFFF"/>
+                </a:solidFill>
+                <a:latin typeface="Aptos"/>
+              </a:defRPr>
+            </a:pPr>
+            <a:r>
+              <a:t>APPLY NEXT</a:t>
+            </a:r>
+          </a:p>
+        </p:txBody>
+      </p:sp>
+      <p:sp>
+        <p:nvSpPr>
+          <p:cNvPr id="25" name="TextBox 24"/>
+          <p:cNvSpPr txBox="1"/>
+          <p:nvPr/>
+        </p:nvSpPr>
+        <p:spPr>
+          <a:xfrm>
+            <a:off x="8430767" y="2596896"/>
+            <a:ext cx="2743200" cy="292608"/>
+          </a:xfrm>
+          <a:prstGeom prst="rect">
+            <a:avLst/>
+          </a:prstGeom>
+          <a:noFill/>
+        </p:spPr>
+        <p:txBody>
+          <a:bodyPr wrap="square" lIns="18288" rIns="18288" tIns="18288" bIns="18288" anchor="t">
+            <a:spAutoFit/>
+          </a:bodyPr>
+          <a:lstStyle/>
+          <a:p>
+            <a:pPr algn="l">
+              <a:defRPr sz="1400" b="1">
+                <a:solidFill>
+                  <a:srgbClr val="111827"/>
+                </a:solidFill>
+                <a:latin typeface="Aptos"/>
+              </a:defRPr>
+            </a:pPr>
+          </a:p>
+        </p:txBody>
+      </p:sp>
+      <p:sp>
+        <p:nvSpPr>
+          <p:cNvPr id="26" name="Oval 25"/>
+          <p:cNvSpPr/>
+          <p:nvPr/>
+        </p:nvSpPr>
+        <p:spPr>
+          <a:xfrm>
+            <a:off x="8430767" y="3154680"/>
+            <a:ext cx="118872" cy="118872"/>
+          </a:xfrm>
+          <a:prstGeom prst="ellipse">
+            <a:avLst/>
+          </a:prstGeom>
+          <a:solidFill>
+            <a:srgbClr val="14B8A6"/>
+          </a:solidFill>
+          <a:ln>
+            <a:noFill/>
+          </a:ln>
+        </p:spPr>
+        <p:style>
+          <a:lnRef idx="1">
+            <a:schemeClr val="accent1"/>
+          </a:lnRef>
+          <a:fillRef idx="3">
+            <a:schemeClr val="accent1"/>
+          </a:fillRef>
+          <a:effectRef idx="2">
+            <a:schemeClr val="accent1"/>
+          </a:effectRef>
+          <a:fontRef idx="minor">
+            <a:schemeClr val="lt1"/>
+          </a:fontRef>
+        </p:style>
+        <p:txBody>
+          <a:bodyPr rtlCol="0" anchor="ctr"/>
+          <a:lstStyle/>
+          <a:p>
+            <a:pPr algn="ctr"/>
+          </a:p>
+        </p:txBody>
+      </p:sp>
+      <p:sp>
+        <p:nvSpPr>
+          <p:cNvPr id="27" name="TextBox 26"/>
+          <p:cNvSpPr txBox="1"/>
+          <p:nvPr/>
+        </p:nvSpPr>
+        <p:spPr>
+          <a:xfrm>
+            <a:off x="8686799" y="3099816"/>
+            <a:ext cx="2468880" cy="384048"/>
+          </a:xfrm>
+          <a:prstGeom prst="rect">
+            <a:avLst/>
+          </a:prstGeom>
+          <a:noFill/>
+        </p:spPr>
+        <p:txBody>
+          <a:bodyPr wrap="square" lIns="18288" rIns="18288" tIns="18288" bIns="18288" anchor="t">
+            <a:spAutoFit/>
+          </a:bodyPr>
+          <a:lstStyle/>
+          <a:p>
+            <a:pPr algn="l">
+              <a:defRPr sz="1150" b="0">
+                <a:solidFill>
+                  <a:srgbClr val="525E71"/>
+                </a:solidFill>
+                <a:latin typeface="Aptos"/>
+              </a:defRPr>
+            </a:pPr>
+            <a:r>
+              <a:t>Students can avoid the common misconception</a:t>
+            </a:r>
+          </a:p>
+        </p:txBody>
+      </p:sp>
+    </p:spTree>
+  </p:cSld>
+  <p:clrMapOvr>
+    <a:masterClrMapping/>
+  </p:clrMapOvr>
+</p:sld>
+</file>
+
+<file path=ppt/slides/slide6.xml><?xml version="1.0" encoding="utf-8"?>
+<p:sld xmlns:a="http://schemas.openxmlformats.org/drawingml/2006/main" xmlns:p="http://schemas.openxmlformats.org/presentationml/2006/main" xmlns:r="http://schemas.openxmlformats.org/officeDocument/2006/relationships">
+  <p:cSld>
+    <p:bg>
+      <p:bgPr>
+        <a:solidFill>
+          <a:srgbClr val="F8FAFC"/>
+        </a:solidFill>
+        <a:effectLst/>
+      </p:bgPr>
+    </p:bg>
+    <p:spTree>
+      <p:nvGrpSpPr>
+        <p:cNvPr id="1" name=""/>
+        <p:cNvGrpSpPr/>
+        <p:nvPr/>
+      </p:nvGrpSpPr>
+      <p:grpSpPr/>
+      <p:sp>
+        <p:nvSpPr>
+          <p:cNvPr id="2" name="Rounded Rectangle 1"/>
+          <p:cNvSpPr/>
+          <p:nvPr/>
+        </p:nvSpPr>
+        <p:spPr>
+          <a:xfrm>
+            <a:off x="713232" y="713232"/>
+            <a:ext cx="10771632" cy="5440680"/>
+          </a:xfrm>
+          <a:prstGeom prst="roundRect">
+            <a:avLst/>
+          </a:prstGeom>
+          <a:solidFill>
+            <a:srgbClr val="FFFFFF"/>
+          </a:solidFill>
+          <a:ln w="12700">
+            <a:solidFill>
+              <a:srgbClr val="E2E8F0"/>
+            </a:solidFill>
+          </a:ln>
+        </p:spPr>
+        <p:style>
+          <a:lnRef idx="1">
+            <a:schemeClr val="accent1"/>
+          </a:lnRef>
+          <a:fillRef idx="3">
+            <a:schemeClr val="accent1"/>
+          </a:fillRef>
+          <a:effectRef idx="2">
+            <a:schemeClr val="accent1"/>
+          </a:effectRef>
+          <a:fontRef idx="minor">
+            <a:schemeClr val="lt1"/>
+          </a:fontRef>
+        </p:style>
+        <p:txBody>
+          <a:bodyPr rtlCol="0" anchor="ctr"/>
+          <a:lstStyle/>
+          <a:p>
+            <a:pPr algn="ctr"/>
+          </a:p>
+        </p:txBody>
+      </p:sp>
+      <p:sp>
+        <p:nvSpPr>
+          <p:cNvPr id="3" name="TextBox 2"/>
+          <p:cNvSpPr txBox="1"/>
+          <p:nvPr/>
+        </p:nvSpPr>
+        <p:spPr>
+          <a:xfrm>
+            <a:off x="1115568" y="1325880"/>
+            <a:ext cx="5760720" cy="658368"/>
+          </a:xfrm>
+          <a:prstGeom prst="rect">
+            <a:avLst/>
+          </a:prstGeom>
+          <a:noFill/>
+        </p:spPr>
+        <p:txBody>
+          <a:bodyPr wrap="square" lIns="18288" rIns="18288" tIns="18288" bIns="18288" anchor="t">
+            <a:spAutoFit/>
+          </a:bodyPr>
+          <a:lstStyle/>
+          <a:p>
+            <a:pPr algn="l">
+              <a:defRPr sz="3800" b="1">
+                <a:solidFill>
+                  <a:srgbClr val="111827"/>
+                </a:solidFill>
+                <a:latin typeface="Aptos"/>
+              </a:defRPr>
+            </a:pPr>
+            <a:r>
+              <a:t>Ready for class</a:t>
+            </a:r>
+          </a:p>
+        </p:txBody>
+      </p:sp>
+      <p:sp>
+        <p:nvSpPr>
+          <p:cNvPr id="4" name="TextBox 3"/>
+          <p:cNvSpPr txBox="1"/>
+          <p:nvPr/>
+        </p:nvSpPr>
+        <p:spPr>
+          <a:xfrm>
+            <a:off x="1143000" y="2121408"/>
+            <a:ext cx="6400800" cy="502920"/>
+          </a:xfrm>
+          <a:prstGeom prst="rect">
+            <a:avLst/>
+          </a:prstGeom>
+          <a:noFill/>
+        </p:spPr>
+        <p:txBody>
+          <a:bodyPr wrap="square" lIns="18288" rIns="18288" tIns="18288" bIns="18288" anchor="t">
+            <a:spAutoFit/>
+          </a:bodyPr>
+          <a:lstStyle/>
+          <a:p>
+            <a:pPr algn="l">
+              <a:defRPr sz="1800" b="0">
+                <a:solidFill>
+                  <a:srgbClr val="525E71"/>
+                </a:solidFill>
+                <a:latin typeface="Aptos"/>
+              </a:defRPr>
+            </a:pPr>
+            <a:r>
+              <a:t>Use the notes, activities, and visual prompts to adapt the lesson live.</a:t>
+            </a:r>
+          </a:p>
+        </p:txBody>
+      </p:sp>
+      <p:sp>
+        <p:nvSpPr>
+          <p:cNvPr id="5" name="TextBox 4"/>
+          <p:cNvSpPr txBox="1"/>
+          <p:nvPr/>
+        </p:nvSpPr>
+        <p:spPr>
+          <a:xfrm>
+            <a:off x="1143000" y="3035808"/>
+            <a:ext cx="4937760" cy="292608"/>
+          </a:xfrm>
+          <a:prstGeom prst="rect">
+            <a:avLst/>
+          </a:prstGeom>
+          <a:noFill/>
+        </p:spPr>
+        <p:txBody>
+          <a:bodyPr wrap="square" lIns="18288" rIns="18288" tIns="18288" bIns="18288" anchor="t">
+            <a:spAutoFit/>
+          </a:bodyPr>
+          <a:lstStyle/>
+          <a:p>
+            <a:pPr algn="l">
+              <a:defRPr sz="1400" b="1">
+                <a:solidFill>
+                  <a:srgbClr val="111827"/>
+                </a:solidFill>
+                <a:latin typeface="Aptos"/>
+              </a:defRPr>
+            </a:pPr>
+            <a:r>
+              <a:t>Quick Finish</a:t>
+            </a:r>
+          </a:p>
+        </p:txBody>
+      </p:sp>
+      <p:sp>
+        <p:nvSpPr>
+          <p:cNvPr id="6" name="Oval 5"/>
+          <p:cNvSpPr/>
+          <p:nvPr/>
+        </p:nvSpPr>
+        <p:spPr>
+          <a:xfrm>
+            <a:off x="1143000" y="3593592"/>
+            <a:ext cx="118872" cy="118872"/>
+          </a:xfrm>
+          <a:prstGeom prst="ellipse">
+            <a:avLst/>
+          </a:prstGeom>
+          <a:solidFill>
+            <a:srgbClr val="14B8A6"/>
+          </a:solidFill>
+          <a:ln>
+            <a:noFill/>
+          </a:ln>
+        </p:spPr>
+        <p:style>
+          <a:lnRef idx="1">
+            <a:schemeClr val="accent1"/>
+          </a:lnRef>
+          <a:fillRef idx="3">
+            <a:schemeClr val="accent1"/>
+          </a:fillRef>
+          <a:effectRef idx="2">
+            <a:schemeClr val="accent1"/>
+          </a:effectRef>
+          <a:fontRef idx="minor">
+            <a:schemeClr val="lt1"/>
+          </a:fontRef>
+        </p:style>
+        <p:txBody>
+          <a:bodyPr rtlCol="0" anchor="ctr"/>
+          <a:lstStyle/>
+          <a:p>
+            <a:pPr algn="ctr"/>
+          </a:p>
+        </p:txBody>
+      </p:sp>
+      <p:sp>
+        <p:nvSpPr>
+          <p:cNvPr id="7" name="TextBox 6"/>
+          <p:cNvSpPr txBox="1"/>
+          <p:nvPr/>
+        </p:nvSpPr>
+        <p:spPr>
+          <a:xfrm>
+            <a:off x="1399032" y="3538728"/>
+            <a:ext cx="4663440" cy="384048"/>
+          </a:xfrm>
+          <a:prstGeom prst="rect">
+            <a:avLst/>
+          </a:prstGeom>
+          <a:noFill/>
+        </p:spPr>
+        <p:txBody>
+          <a:bodyPr wrap="square" lIns="18288" rIns="18288" tIns="18288" bIns="18288" anchor="t">
+            <a:spAutoFit/>
+          </a:bodyPr>
+          <a:lstStyle/>
+          <a:p>
+            <a:pPr algn="l">
+              <a:defRPr sz="1150" b="0">
+                <a:solidFill>
+                  <a:srgbClr val="525E71"/>
+                </a:solidFill>
+                <a:latin typeface="Aptos"/>
+              </a:defRPr>
+            </a:pPr>
+            <a:r>
+              <a:t>Ask one retrieval question</a:t>
+            </a:r>
+          </a:p>
+        </p:txBody>
+      </p:sp>
+      <p:sp>
+        <p:nvSpPr>
+          <p:cNvPr id="8" name="Oval 7"/>
+          <p:cNvSpPr/>
+          <p:nvPr/>
+        </p:nvSpPr>
+        <p:spPr>
+          <a:xfrm>
+            <a:off x="1143000" y="4050792"/>
+            <a:ext cx="118872" cy="118872"/>
+          </a:xfrm>
+          <a:prstGeom prst="ellipse">
+            <a:avLst/>
+          </a:prstGeom>
+          <a:solidFill>
+            <a:srgbClr val="14B8A6"/>
+          </a:solidFill>
+          <a:ln>
+            <a:noFill/>
+          </a:ln>
+        </p:spPr>
+        <p:style>
+          <a:lnRef idx="1">
+            <a:schemeClr val="accent1"/>
+          </a:lnRef>
+          <a:fillRef idx="3">
+            <a:schemeClr val="accent1"/>
+          </a:fillRef>
+          <a:effectRef idx="2">
+            <a:schemeClr val="accent1"/>
+          </a:effectRef>
+          <a:fontRef idx="minor">
+            <a:schemeClr val="lt1"/>
+          </a:fontRef>
+        </p:style>
+        <p:txBody>
+          <a:bodyPr rtlCol="0" anchor="ctr"/>
+          <a:lstStyle/>
+          <a:p>
+            <a:pPr algn="ctr"/>
+          </a:p>
+        </p:txBody>
+      </p:sp>
+      <p:sp>
+        <p:nvSpPr>
+          <p:cNvPr id="9" name="TextBox 8"/>
+          <p:cNvSpPr txBox="1"/>
+          <p:nvPr/>
+        </p:nvSpPr>
+        <p:spPr>
+          <a:xfrm>
+            <a:off x="1399032" y="3995928"/>
+            <a:ext cx="4663440" cy="384048"/>
+          </a:xfrm>
+          <a:prstGeom prst="rect">
+            <a:avLst/>
+          </a:prstGeom>
+          <a:noFill/>
+        </p:spPr>
+        <p:txBody>
+          <a:bodyPr wrap="square" lIns="18288" rIns="18288" tIns="18288" bIns="18288" anchor="t">
+            <a:spAutoFit/>
+          </a:bodyPr>
+          <a:lstStyle/>
+          <a:p>
+            <a:pPr algn="l">
+              <a:defRPr sz="1150" b="0">
+                <a:solidFill>
+                  <a:srgbClr val="525E71"/>
+                </a:solidFill>
+                <a:latin typeface="Aptos"/>
+              </a:defRPr>
+            </a:pPr>
+            <a:r>
+              <a:t>Let students explain one visual</a:t>
+            </a:r>
+          </a:p>
+        </p:txBody>
+      </p:sp>
+      <p:sp>
+        <p:nvSpPr>
+          <p:cNvPr id="10" name="Oval 9"/>
+          <p:cNvSpPr/>
+          <p:nvPr/>
+        </p:nvSpPr>
+        <p:spPr>
+          <a:xfrm>
+            <a:off x="1143000" y="4507992"/>
+            <a:ext cx="118872" cy="118872"/>
+          </a:xfrm>
+          <a:prstGeom prst="ellipse">
+            <a:avLst/>
+          </a:prstGeom>
+          <a:solidFill>
+            <a:srgbClr val="14B8A6"/>
+          </a:solidFill>
+          <a:ln>
+            <a:noFill/>
+          </a:ln>
+        </p:spPr>
+        <p:style>
+          <a:lnRef idx="1">
+            <a:schemeClr val="accent1"/>
+          </a:lnRef>
+          <a:fillRef idx="3">
+            <a:schemeClr val="accent1"/>
+          </a:fillRef>
+          <a:effectRef idx="2">
+            <a:schemeClr val="accent1"/>
+          </a:effectRef>
+          <a:fontRef idx="minor">
+            <a:schemeClr val="lt1"/>
+          </a:fontRef>
+        </p:style>
+        <p:txBody>
+          <a:bodyPr rtlCol="0" anchor="ctr"/>
+          <a:lstStyle/>
+          <a:p>
+            <a:pPr algn="ctr"/>
+          </a:p>
+        </p:txBody>
+      </p:sp>
+      <p:sp>
+        <p:nvSpPr>
+          <p:cNvPr id="11" name="TextBox 10"/>
+          <p:cNvSpPr txBox="1"/>
+          <p:nvPr/>
+        </p:nvSpPr>
+        <p:spPr>
+          <a:xfrm>
+            <a:off x="1399032" y="4453128"/>
+            <a:ext cx="4663440" cy="384048"/>
+          </a:xfrm>
+          <a:prstGeom prst="rect">
+            <a:avLst/>
+          </a:prstGeom>
+          <a:noFill/>
+        </p:spPr>
+        <p:txBody>
+          <a:bodyPr wrap="square" lIns="18288" rIns="18288" tIns="18288" bIns="18288" anchor="t">
+            <a:spAutoFit/>
+          </a:bodyPr>
+          <a:lstStyle/>
+          <a:p>
+            <a:pPr algn="l">
+              <a:defRPr sz="1150" b="0">
+                <a:solidFill>
+                  <a:srgbClr val="525E71"/>
+                </a:solidFill>
+                <a:latin typeface="Aptos"/>
+              </a:defRPr>
+            </a:pPr>
+            <a:r>
+              <a:t>Collect one exit-ticket response</a:t>
+            </a:r>
+          </a:p>
+        </p:txBody>
+      </p:sp>
+      <p:sp>
+        <p:nvSpPr>
+          <p:cNvPr id="12" name="Rounded Rectangle 11"/>
+          <p:cNvSpPr/>
+          <p:nvPr/>
+        </p:nvSpPr>
+        <p:spPr>
+          <a:xfrm>
+            <a:off x="7909560" y="1408176"/>
+            <a:ext cx="2377440" cy="2377440"/>
+          </a:xfrm>
+          <a:prstGeom prst="roundRect">
+            <a:avLst/>
+          </a:prstGeom>
+          <a:solidFill>
+            <a:srgbClr val="14B8A6"/>
+          </a:solidFill>
+          <a:ln>
+            <a:noFill/>
+          </a:ln>
+        </p:spPr>
+        <p:style>
+          <a:lnRef idx="1">
+            <a:schemeClr val="accent1"/>
+          </a:lnRef>
+          <a:fillRef idx="3">
+            <a:schemeClr val="accent1"/>
+          </a:fillRef>
+          <a:effectRef idx="2">
+            <a:schemeClr val="accent1"/>
+          </a:effectRef>
+          <a:fontRef idx="minor">
+            <a:schemeClr val="lt1"/>
+          </a:fontRef>
+        </p:style>
+        <p:txBody>
+          <a:bodyPr rtlCol="0" anchor="ctr"/>
+          <a:lstStyle/>
+          <a:p>
+            <a:pPr algn="ctr"/>
+          </a:p>
+        </p:txBody>
+      </p:sp>
+      <p:sp>
+        <p:nvSpPr>
+          <p:cNvPr id="13" name="TextBox 12"/>
+          <p:cNvSpPr txBox="1"/>
+          <p:nvPr/>
+        </p:nvSpPr>
+        <p:spPr>
+          <a:xfrm>
+            <a:off x="8183879" y="1847088"/>
+            <a:ext cx="1828800" cy="868680"/>
+          </a:xfrm>
+          <a:prstGeom prst="rect">
+            <a:avLst/>
+          </a:prstGeom>
+          <a:noFill/>
+        </p:spPr>
+        <p:txBody>
+          <a:bodyPr wrap="square" lIns="18288" rIns="18288" tIns="18288" bIns="18288" anchor="t">
+            <a:spAutoFit/>
+          </a:bodyPr>
+          <a:lstStyle/>
+          <a:p>
+            <a:pPr algn="ctr">
+              <a:defRPr sz="4800" b="1">
+                <a:solidFill>
+                  <a:srgbClr val="FFFFFF"/>
+                </a:solidFill>
+                <a:latin typeface="Aptos"/>
+              </a:defRPr>
+            </a:pPr>
+            <a:r>
+              <a:t>4</a:t>
+            </a:r>
+          </a:p>
+        </p:txBody>
+      </p:sp>
+      <p:sp>
+        <p:nvSpPr>
+          <p:cNvPr id="14" name="TextBox 13"/>
+          <p:cNvSpPr txBox="1"/>
+          <p:nvPr/>
+        </p:nvSpPr>
+        <p:spPr>
+          <a:xfrm>
+            <a:off x="8183879" y="2816352"/>
+            <a:ext cx="1828800" cy="320040"/>
+          </a:xfrm>
+          <a:prstGeom prst="rect">
+            <a:avLst/>
+          </a:prstGeom>
+          <a:noFill/>
+        </p:spPr>
+        <p:txBody>
+          <a:bodyPr wrap="square" lIns="18288" rIns="18288" tIns="18288" bIns="18288" anchor="t">
+            <a:spAutoFit/>
+          </a:bodyPr>
+          <a:lstStyle/>
+          <a:p>
+            <a:pPr algn="ctr">
+              <a:defRPr sz="1600" b="1">
+                <a:solidFill>
+                  <a:srgbClr val="FFFFFF"/>
+                </a:solidFill>
+                <a:latin typeface="Aptos"/>
+              </a:defRPr>
+            </a:pPr>
+            <a:r>
+              <a:t>slides</a:t>
             </a:r>
           </a:p>
         </p:txBody>
@@ -3445,4 +8354,324 @@
   </a:objectDefaults>
   <a:extraClrSchemeLst/>
 </a:theme>
+</file>
+
+<file path=ppt/theme/theme2.xml><?xml version="1.0" encoding="utf-8"?>
+<a:theme xmlns:a="http://schemas.openxmlformats.org/drawingml/2006/main" name="Office Theme">
+  <a:themeElements>
+    <a:clrScheme name="Office">
+      <a:dk1>
+        <a:sysClr val="windowText" lastClr="000000"/>
+      </a:dk1>
+      <a:lt1>
+        <a:sysClr val="window" lastClr="FFFFFF"/>
+      </a:lt1>
+      <a:dk2>
+        <a:srgbClr val="1F497D"/>
+      </a:dk2>
+      <a:lt2>
+        <a:srgbClr val="EEECE1"/>
+      </a:lt2>
+      <a:accent1>
+        <a:srgbClr val="4F81BD"/>
+      </a:accent1>
+      <a:accent2>
+        <a:srgbClr val="C0504D"/>
+      </a:accent2>
+      <a:accent3>
+        <a:srgbClr val="9BBB59"/>
+      </a:accent3>
+      <a:accent4>
+        <a:srgbClr val="8064A2"/>
+      </a:accent4>
+      <a:accent5>
+        <a:srgbClr val="4BACC6"/>
+      </a:accent5>
+      <a:accent6>
+        <a:srgbClr val="F79646"/>
+      </a:accent6>
+      <a:hlink>
+        <a:srgbClr val="0000FF"/>
+      </a:hlink>
+      <a:folHlink>
+        <a:srgbClr val="800080"/>
+      </a:folHlink>
+    </a:clrScheme>
+    <a:fontScheme name="Office">
+      <a:majorFont>
+        <a:latin typeface="Calibri"/>
+        <a:ea typeface=""/>
+        <a:cs typeface=""/>
+        <a:font script="Jpan" typeface="ＭＳ Ｐゴシック"/>
+        <a:font script="Hang" typeface="맑은 고딕"/>
+        <a:font script="Hans" typeface="宋体"/>
+        <a:font script="Hant" typeface="新細明體"/>
+        <a:font script="Arab" typeface="Times New Roman"/>
+        <a:font script="Hebr" typeface="Times New Roman"/>
+        <a:font script="Thai" typeface="Angsana New"/>
+        <a:font script="Ethi" typeface="Nyala"/>
+        <a:font script="Beng" typeface="Vrinda"/>
+        <a:font script="Gujr" typeface="Shruti"/>
+        <a:font script="Khmr" typeface="MoolBoran"/>
+        <a:font script="Knda" typeface="Tunga"/>
+        <a:font script="Guru" typeface="Raavi"/>
+        <a:font script="Cans" typeface="Euphemia"/>
+        <a:font script="Cher" typeface="Plantagenet Cherokee"/>
+        <a:font script="Yiii" typeface="Microsoft Yi Baiti"/>
+        <a:font script="Tibt" typeface="Microsoft Himalaya"/>
+        <a:font script="Thaa" typeface="MV Boli"/>
+        <a:font script="Deva" typeface="Mangal"/>
+        <a:font script="Telu" typeface="Gautami"/>
+        <a:font script="Taml" typeface="Latha"/>
+        <a:font script="Syrc" typeface="Estrangelo Edessa"/>
+        <a:font script="Orya" typeface="Kalinga"/>
+        <a:font script="Mlym" typeface="Kartika"/>
+        <a:font script="Laoo" typeface="DokChampa"/>
+        <a:font script="Sinh" typeface="Iskoola Pota"/>
+        <a:font script="Mong" typeface="Mongolian Baiti"/>
+        <a:font script="Viet" typeface="Times New Roman"/>
+        <a:font script="Uigh" typeface="Microsoft Uighur"/>
+        <a:font script="Geor" typeface="Sylfaen"/>
+      </a:majorFont>
+      <a:minorFont>
+        <a:latin typeface="Calibri"/>
+        <a:ea typeface=""/>
+        <a:cs typeface=""/>
+        <a:font script="Jpan" typeface="ＭＳ Ｐゴシック"/>
+        <a:font script="Hang" typeface="맑은 고딕"/>
+        <a:font script="Hans" typeface="宋体"/>
+        <a:font script="Hant" typeface="新細明體"/>
+        <a:font script="Arab" typeface="Arial"/>
+        <a:font script="Hebr" typeface="Arial"/>
+        <a:font script="Thai" typeface="Cordia New"/>
+        <a:font script="Ethi" typeface="Nyala"/>
+        <a:font script="Beng" typeface="Vrinda"/>
+        <a:font script="Gujr" typeface="Shruti"/>
+        <a:font script="Khmr" typeface="DaunPenh"/>
+        <a:font script="Knda" typeface="Tunga"/>
+        <a:font script="Guru" typeface="Raavi"/>
+        <a:font script="Cans" typeface="Euphemia"/>
+        <a:font script="Cher" typeface="Plantagenet Cherokee"/>
+        <a:font script="Yiii" typeface="Microsoft Yi Baiti"/>
+        <a:font script="Tibt" typeface="Microsoft Himalaya"/>
+        <a:font script="Thaa" typeface="MV Boli"/>
+        <a:font script="Deva" typeface="Mangal"/>
+        <a:font script="Telu" typeface="Gautami"/>
+        <a:font script="Taml" typeface="Latha"/>
+        <a:font script="Syrc" typeface="Estrangelo Edessa"/>
+        <a:font script="Orya" typeface="Kalinga"/>
+        <a:font script="Mlym" typeface="Kartika"/>
+        <a:font script="Laoo" typeface="DokChampa"/>
+        <a:font script="Sinh" typeface="Iskoola Pota"/>
+        <a:font script="Mong" typeface="Mongolian Baiti"/>
+        <a:font script="Viet" typeface="Arial"/>
+        <a:font script="Uigh" typeface="Microsoft Uighur"/>
+        <a:font script="Geor" typeface="Sylfaen"/>
+      </a:minorFont>
+    </a:fontScheme>
+    <a:fmtScheme name="Office">
+      <a:fillStyleLst>
+        <a:solidFill>
+          <a:schemeClr val="phClr"/>
+        </a:solidFill>
+        <a:gradFill rotWithShape="1">
+          <a:gsLst>
+            <a:gs pos="0">
+              <a:schemeClr val="phClr">
+                <a:tint val="50000"/>
+                <a:satMod val="300000"/>
+              </a:schemeClr>
+            </a:gs>
+            <a:gs pos="35000">
+              <a:schemeClr val="phClr">
+                <a:tint val="37000"/>
+                <a:satMod val="300000"/>
+              </a:schemeClr>
+            </a:gs>
+            <a:gs pos="100000">
+              <a:schemeClr val="phClr">
+                <a:tint val="15000"/>
+                <a:satMod val="350000"/>
+              </a:schemeClr>
+            </a:gs>
+          </a:gsLst>
+          <a:lin ang="16200000" scaled="1"/>
+        </a:gradFill>
+        <a:gradFill rotWithShape="1">
+          <a:gsLst>
+            <a:gs pos="0">
+              <a:schemeClr val="phClr">
+                <a:tint val="100000"/>
+                <a:shade val="100000"/>
+                <a:satMod val="130000"/>
+              </a:schemeClr>
+            </a:gs>
+            <a:gs pos="100000">
+              <a:schemeClr val="phClr">
+                <a:tint val="50000"/>
+                <a:shade val="100000"/>
+                <a:satMod val="350000"/>
+              </a:schemeClr>
+            </a:gs>
+          </a:gsLst>
+          <a:lin ang="16200000" scaled="0"/>
+        </a:gradFill>
+      </a:fillStyleLst>
+      <a:lnStyleLst>
+        <a:ln w="9525" cap="flat" cmpd="sng" algn="ctr">
+          <a:solidFill>
+            <a:schemeClr val="phClr">
+              <a:shade val="95000"/>
+              <a:satMod val="105000"/>
+            </a:schemeClr>
+          </a:solidFill>
+          <a:prstDash val="solid"/>
+        </a:ln>
+        <a:ln w="25400" cap="flat" cmpd="sng" algn="ctr">
+          <a:solidFill>
+            <a:schemeClr val="phClr"/>
+          </a:solidFill>
+          <a:prstDash val="solid"/>
+        </a:ln>
+        <a:ln w="38100" cap="flat" cmpd="sng" algn="ctr">
+          <a:solidFill>
+            <a:schemeClr val="phClr"/>
+          </a:solidFill>
+          <a:prstDash val="solid"/>
+        </a:ln>
+      </a:lnStyleLst>
+      <a:effectStyleLst>
+        <a:effectStyle>
+          <a:effectLst>
+            <a:outerShdw blurRad="40000" dist="20000" dir="5400000" rotWithShape="0">
+              <a:srgbClr val="000000">
+                <a:alpha val="38000"/>
+              </a:srgbClr>
+            </a:outerShdw>
+          </a:effectLst>
+        </a:effectStyle>
+        <a:effectStyle>
+          <a:effectLst>
+            <a:outerShdw blurRad="40000" dist="23000" dir="5400000" rotWithShape="0">
+              <a:srgbClr val="000000">
+                <a:alpha val="35000"/>
+              </a:srgbClr>
+            </a:outerShdw>
+          </a:effectLst>
+        </a:effectStyle>
+        <a:effectStyle>
+          <a:effectLst>
+            <a:outerShdw blurRad="40000" dist="23000" dir="5400000" rotWithShape="0">
+              <a:srgbClr val="000000">
+                <a:alpha val="35000"/>
+              </a:srgbClr>
+            </a:outerShdw>
+          </a:effectLst>
+          <a:scene3d>
+            <a:camera prst="orthographicFront">
+              <a:rot lat="0" lon="0" rev="0"/>
+            </a:camera>
+            <a:lightRig rig="threePt" dir="t">
+              <a:rot lat="0" lon="0" rev="1200000"/>
+            </a:lightRig>
+          </a:scene3d>
+          <a:sp3d>
+            <a:bevelT w="63500" h="25400"/>
+          </a:sp3d>
+        </a:effectStyle>
+      </a:effectStyleLst>
+      <a:bgFillStyleLst>
+        <a:solidFill>
+          <a:schemeClr val="phClr"/>
+        </a:solidFill>
+        <a:gradFill rotWithShape="1">
+          <a:gsLst>
+            <a:gs pos="0">
+              <a:schemeClr val="phClr">
+                <a:tint val="40000"/>
+                <a:satMod val="350000"/>
+              </a:schemeClr>
+            </a:gs>
+            <a:gs pos="40000">
+              <a:schemeClr val="phClr">
+                <a:tint val="45000"/>
+                <a:shade val="99000"/>
+                <a:satMod val="350000"/>
+              </a:schemeClr>
+            </a:gs>
+            <a:gs pos="100000">
+              <a:schemeClr val="phClr">
+                <a:shade val="20000"/>
+                <a:satMod val="255000"/>
+              </a:schemeClr>
+            </a:gs>
+          </a:gsLst>
+          <a:path path="circle">
+            <a:fillToRect l="50000" t="-80000" r="50000" b="180000"/>
+          </a:path>
+        </a:gradFill>
+        <a:gradFill rotWithShape="1">
+          <a:gsLst>
+            <a:gs pos="0">
+              <a:schemeClr val="phClr">
+                <a:tint val="80000"/>
+                <a:satMod val="300000"/>
+              </a:schemeClr>
+            </a:gs>
+            <a:gs pos="100000">
+              <a:schemeClr val="phClr">
+                <a:shade val="30000"/>
+                <a:satMod val="200000"/>
+              </a:schemeClr>
+            </a:gs>
+          </a:gsLst>
+          <a:path path="circle">
+            <a:fillToRect l="50000" t="50000" r="50000" b="50000"/>
+          </a:path>
+        </a:gradFill>
+      </a:bgFillStyleLst>
+    </a:fmtScheme>
+  </a:themeElements>
+  <a:objectDefaults>
+    <a:spDef>
+      <a:spPr/>
+      <a:bodyPr/>
+      <a:lstStyle/>
+      <a:style>
+        <a:lnRef idx="1">
+          <a:schemeClr val="accent1"/>
+        </a:lnRef>
+        <a:fillRef idx="3">
+          <a:schemeClr val="accent1"/>
+        </a:fillRef>
+        <a:effectRef idx="2">
+          <a:schemeClr val="accent1"/>
+        </a:effectRef>
+        <a:fontRef idx="minor">
+          <a:schemeClr val="lt1"/>
+        </a:fontRef>
+      </a:style>
+    </a:spDef>
+    <a:lnDef>
+      <a:spPr/>
+      <a:bodyPr/>
+      <a:lstStyle/>
+      <a:style>
+        <a:lnRef idx="2">
+          <a:schemeClr val="accent1"/>
+        </a:lnRef>
+        <a:fillRef idx="0">
+          <a:schemeClr val="accent1"/>
+        </a:fillRef>
+        <a:effectRef idx="1">
+          <a:schemeClr val="accent1"/>
+        </a:effectRef>
+        <a:fontRef idx="minor">
+          <a:schemeClr val="tx1"/>
+        </a:fontRef>
+      </a:style>
+    </a:lnDef>
+  </a:objectDefaults>
+  <a:extraClrSchemeLst/>
+</a:theme>
 </file>